--- a/docs/pptx/auc3/ritu-auc3-linsubhr-ratio-grade2_10pct.pptx
+++ b/docs/pptx/auc3/ritu-auc3-linsubhr-ratio-grade2_10pct.pptx
@@ -2443,7 +2443,7 @@
           </p:nvSpPr>
           <p:spPr>
             <a:xfrm>
-              <a:off x="1012387" y="2073503"/>
+              <a:off x="1013326" y="2073503"/>
               <a:ext cx="0" cy="3649639"/>
             </a:xfrm>
             <a:custGeom>
@@ -2486,7 +2486,7 @@
           </p:nvSpPr>
           <p:spPr>
             <a:xfrm>
-              <a:off x="1914572" y="2073503"/>
+              <a:off x="1915271" y="2073503"/>
               <a:ext cx="0" cy="3649639"/>
             </a:xfrm>
             <a:custGeom>
@@ -2529,7 +2529,7 @@
           </p:nvSpPr>
           <p:spPr>
             <a:xfrm>
-              <a:off x="2816756" y="2073503"/>
+              <a:off x="2817216" y="2073503"/>
               <a:ext cx="0" cy="3649639"/>
             </a:xfrm>
             <a:custGeom>
@@ -2572,7 +2572,7 @@
           </p:nvSpPr>
           <p:spPr>
             <a:xfrm>
-              <a:off x="3718941" y="2073503"/>
+              <a:off x="3719160" y="2073503"/>
               <a:ext cx="0" cy="3649639"/>
             </a:xfrm>
             <a:custGeom>
@@ -2615,7 +2615,7 @@
           </p:nvSpPr>
           <p:spPr>
             <a:xfrm>
-              <a:off x="4621125" y="2073503"/>
+              <a:off x="4621105" y="2073503"/>
               <a:ext cx="0" cy="3649639"/>
             </a:xfrm>
             <a:custGeom>
@@ -2658,7 +2658,7 @@
           </p:nvSpPr>
           <p:spPr>
             <a:xfrm>
-              <a:off x="5523310" y="2073503"/>
+              <a:off x="5523050" y="2073503"/>
               <a:ext cx="0" cy="3649639"/>
             </a:xfrm>
             <a:custGeom>
@@ -2701,7 +2701,7 @@
           </p:nvSpPr>
           <p:spPr>
             <a:xfrm>
-              <a:off x="6425495" y="2073503"/>
+              <a:off x="6424995" y="2073503"/>
               <a:ext cx="0" cy="3649639"/>
             </a:xfrm>
             <a:custGeom>
@@ -2744,7 +2744,7 @@
           </p:nvSpPr>
           <p:spPr>
             <a:xfrm>
-              <a:off x="7327679" y="2073503"/>
+              <a:off x="7326940" y="2073503"/>
               <a:ext cx="0" cy="3649639"/>
             </a:xfrm>
             <a:custGeom>
@@ -2787,7 +2787,7 @@
           </p:nvSpPr>
           <p:spPr>
             <a:xfrm>
-              <a:off x="8229864" y="2073503"/>
+              <a:off x="8228885" y="2073503"/>
               <a:ext cx="0" cy="3649639"/>
             </a:xfrm>
             <a:custGeom>
@@ -3045,7 +3045,7 @@
           </p:nvSpPr>
           <p:spPr>
             <a:xfrm>
-              <a:off x="1463479" y="2073503"/>
+              <a:off x="1464298" y="2073503"/>
               <a:ext cx="0" cy="3649639"/>
             </a:xfrm>
             <a:custGeom>
@@ -3088,7 +3088,7 @@
           </p:nvSpPr>
           <p:spPr>
             <a:xfrm>
-              <a:off x="2365664" y="2073503"/>
+              <a:off x="2366243" y="2073503"/>
               <a:ext cx="0" cy="3649639"/>
             </a:xfrm>
             <a:custGeom>
@@ -3131,7 +3131,7 @@
           </p:nvSpPr>
           <p:spPr>
             <a:xfrm>
-              <a:off x="3267849" y="2073503"/>
+              <a:off x="3268188" y="2073503"/>
               <a:ext cx="0" cy="3649639"/>
             </a:xfrm>
             <a:custGeom>
@@ -3174,7 +3174,7 @@
           </p:nvSpPr>
           <p:spPr>
             <a:xfrm>
-              <a:off x="4170033" y="2073503"/>
+              <a:off x="4170133" y="2073503"/>
               <a:ext cx="0" cy="3649639"/>
             </a:xfrm>
             <a:custGeom>
@@ -3217,7 +3217,7 @@
           </p:nvSpPr>
           <p:spPr>
             <a:xfrm>
-              <a:off x="5072218" y="2073503"/>
+              <a:off x="5072078" y="2073503"/>
               <a:ext cx="0" cy="3649639"/>
             </a:xfrm>
             <a:custGeom>
@@ -3260,7 +3260,7 @@
           </p:nvSpPr>
           <p:spPr>
             <a:xfrm>
-              <a:off x="5974402" y="2073503"/>
+              <a:off x="5974022" y="2073503"/>
               <a:ext cx="0" cy="3649639"/>
             </a:xfrm>
             <a:custGeom>
@@ -3303,7 +3303,7 @@
           </p:nvSpPr>
           <p:spPr>
             <a:xfrm>
-              <a:off x="6876587" y="2073503"/>
+              <a:off x="6875967" y="2073503"/>
               <a:ext cx="0" cy="3649639"/>
             </a:xfrm>
             <a:custGeom>
@@ -3346,7 +3346,7 @@
           </p:nvSpPr>
           <p:spPr>
             <a:xfrm>
-              <a:off x="7778772" y="2073503"/>
+              <a:off x="7777912" y="2073503"/>
               <a:ext cx="0" cy="3649639"/>
             </a:xfrm>
             <a:custGeom>
@@ -3390,599 +3390,599 @@
           <p:spPr>
             <a:xfrm>
               <a:off x="1172049" y="2073503"/>
-              <a:ext cx="7090630" cy="3391590"/>
+              <a:ext cx="7090630" cy="3392612"/>
             </a:xfrm>
             <a:custGeom>
               <a:avLst/>
               <a:pathLst>
-                <a:path w="7090630" h="3391590">
+                <a:path w="7090630" h="3392612">
                   <a:moveTo>
-                    <a:pt x="316860" y="0"/>
+                    <a:pt x="339006" y="0"/>
                   </a:moveTo>
                   <a:lnTo>
-                    <a:pt x="358112" y="76825"/>
-                  </a:lnTo>
-                  <a:lnTo>
-                    <a:pt x="429735" y="205188"/>
-                  </a:lnTo>
-                  <a:lnTo>
-                    <a:pt x="501357" y="328714"/>
-                  </a:lnTo>
-                  <a:lnTo>
-                    <a:pt x="572980" y="447586"/>
-                  </a:lnTo>
-                  <a:lnTo>
-                    <a:pt x="644602" y="561979"/>
-                  </a:lnTo>
-                  <a:lnTo>
-                    <a:pt x="716225" y="672062"/>
-                  </a:lnTo>
-                  <a:lnTo>
-                    <a:pt x="787847" y="777997"/>
-                  </a:lnTo>
-                  <a:lnTo>
-                    <a:pt x="859470" y="879942"/>
-                  </a:lnTo>
-                  <a:lnTo>
-                    <a:pt x="931092" y="978045"/>
-                  </a:lnTo>
-                  <a:lnTo>
-                    <a:pt x="1002715" y="1072452"/>
-                  </a:lnTo>
-                  <a:lnTo>
-                    <a:pt x="1074337" y="1163302"/>
-                  </a:lnTo>
-                  <a:lnTo>
-                    <a:pt x="1145960" y="1250729"/>
-                  </a:lnTo>
-                  <a:lnTo>
-                    <a:pt x="1217582" y="1334863"/>
-                  </a:lnTo>
-                  <a:lnTo>
-                    <a:pt x="1289205" y="1415826"/>
-                  </a:lnTo>
-                  <a:lnTo>
-                    <a:pt x="1360827" y="1493739"/>
-                  </a:lnTo>
-                  <a:lnTo>
-                    <a:pt x="1432450" y="1568716"/>
-                  </a:lnTo>
-                  <a:lnTo>
-                    <a:pt x="1504073" y="1640868"/>
-                  </a:lnTo>
-                  <a:lnTo>
-                    <a:pt x="1575695" y="1710302"/>
-                  </a:lnTo>
-                  <a:lnTo>
-                    <a:pt x="1647318" y="1777120"/>
-                  </a:lnTo>
-                  <a:lnTo>
-                    <a:pt x="1718940" y="1841421"/>
-                  </a:lnTo>
-                  <a:lnTo>
-                    <a:pt x="1790563" y="1903298"/>
-                  </a:lnTo>
-                  <a:lnTo>
-                    <a:pt x="1862185" y="1962845"/>
-                  </a:lnTo>
-                  <a:lnTo>
-                    <a:pt x="1933808" y="2020148"/>
-                  </a:lnTo>
-                  <a:lnTo>
-                    <a:pt x="2005430" y="2075292"/>
-                  </a:lnTo>
-                  <a:lnTo>
-                    <a:pt x="2077053" y="2128358"/>
-                  </a:lnTo>
-                  <a:lnTo>
-                    <a:pt x="2148675" y="2179425"/>
-                  </a:lnTo>
-                  <a:lnTo>
-                    <a:pt x="2220298" y="2228567"/>
-                  </a:lnTo>
-                  <a:lnTo>
-                    <a:pt x="2291920" y="2275859"/>
-                  </a:lnTo>
-                  <a:lnTo>
-                    <a:pt x="2363543" y="2321368"/>
-                  </a:lnTo>
-                  <a:lnTo>
-                    <a:pt x="2435165" y="2365163"/>
-                  </a:lnTo>
-                  <a:lnTo>
-                    <a:pt x="2506788" y="2407308"/>
-                  </a:lnTo>
-                  <a:lnTo>
-                    <a:pt x="2578410" y="2447865"/>
-                  </a:lnTo>
-                  <a:lnTo>
-                    <a:pt x="2650033" y="2486893"/>
-                  </a:lnTo>
-                  <a:lnTo>
-                    <a:pt x="2721655" y="2524452"/>
-                  </a:lnTo>
-                  <a:lnTo>
-                    <a:pt x="2793278" y="2560595"/>
-                  </a:lnTo>
-                  <a:lnTo>
-                    <a:pt x="2864901" y="2595377"/>
-                  </a:lnTo>
-                  <a:lnTo>
-                    <a:pt x="2936523" y="2628848"/>
-                  </a:lnTo>
-                  <a:lnTo>
-                    <a:pt x="3008146" y="2655217"/>
-                  </a:lnTo>
-                  <a:lnTo>
-                    <a:pt x="3079768" y="2659577"/>
-                  </a:lnTo>
-                  <a:lnTo>
-                    <a:pt x="3151391" y="2663914"/>
-                  </a:lnTo>
-                  <a:lnTo>
-                    <a:pt x="3223013" y="2668228"/>
-                  </a:lnTo>
-                  <a:lnTo>
-                    <a:pt x="3294636" y="2672519"/>
-                  </a:lnTo>
-                  <a:lnTo>
-                    <a:pt x="3366258" y="2676788"/>
-                  </a:lnTo>
-                  <a:lnTo>
-                    <a:pt x="3437881" y="2681034"/>
-                  </a:lnTo>
-                  <a:lnTo>
-                    <a:pt x="3509503" y="2685258"/>
-                  </a:lnTo>
-                  <a:lnTo>
-                    <a:pt x="3581126" y="2689460"/>
-                  </a:lnTo>
-                  <a:lnTo>
-                    <a:pt x="3652748" y="2693639"/>
-                  </a:lnTo>
-                  <a:lnTo>
-                    <a:pt x="3724371" y="2697797"/>
-                  </a:lnTo>
-                  <a:lnTo>
-                    <a:pt x="3795993" y="2701933"/>
-                  </a:lnTo>
-                  <a:lnTo>
-                    <a:pt x="3867616" y="2706047"/>
-                  </a:lnTo>
-                  <a:lnTo>
-                    <a:pt x="3939238" y="2710139"/>
-                  </a:lnTo>
-                  <a:lnTo>
-                    <a:pt x="4010861" y="2714210"/>
-                  </a:lnTo>
-                  <a:lnTo>
-                    <a:pt x="4082483" y="2718259"/>
-                  </a:lnTo>
-                  <a:lnTo>
-                    <a:pt x="4154106" y="2722287"/>
-                  </a:lnTo>
-                  <a:lnTo>
-                    <a:pt x="4225729" y="2726294"/>
-                  </a:lnTo>
-                  <a:lnTo>
-                    <a:pt x="4297351" y="2730280"/>
-                  </a:lnTo>
-                  <a:lnTo>
-                    <a:pt x="4368974" y="2734245"/>
-                  </a:lnTo>
-                  <a:lnTo>
-                    <a:pt x="4440596" y="2738189"/>
-                  </a:lnTo>
-                  <a:lnTo>
-                    <a:pt x="4512219" y="2742112"/>
-                  </a:lnTo>
-                  <a:lnTo>
-                    <a:pt x="4583841" y="2746015"/>
-                  </a:lnTo>
-                  <a:lnTo>
-                    <a:pt x="4655464" y="2749897"/>
-                  </a:lnTo>
-                  <a:lnTo>
-                    <a:pt x="4727086" y="2753758"/>
-                  </a:lnTo>
-                  <a:lnTo>
-                    <a:pt x="4798709" y="2757600"/>
-                  </a:lnTo>
-                  <a:lnTo>
-                    <a:pt x="4870331" y="2761421"/>
-                  </a:lnTo>
-                  <a:lnTo>
-                    <a:pt x="4941954" y="2765222"/>
-                  </a:lnTo>
-                  <a:lnTo>
-                    <a:pt x="5013576" y="2769002"/>
-                  </a:lnTo>
-                  <a:lnTo>
-                    <a:pt x="5085199" y="2772764"/>
-                  </a:lnTo>
-                  <a:lnTo>
-                    <a:pt x="5156821" y="2776505"/>
-                  </a:lnTo>
-                  <a:lnTo>
-                    <a:pt x="5228444" y="2780226"/>
-                  </a:lnTo>
-                  <a:lnTo>
-                    <a:pt x="5300066" y="2783928"/>
-                  </a:lnTo>
-                  <a:lnTo>
-                    <a:pt x="5371689" y="2787611"/>
-                  </a:lnTo>
-                  <a:lnTo>
-                    <a:pt x="5443311" y="2791274"/>
-                  </a:lnTo>
-                  <a:lnTo>
-                    <a:pt x="5514934" y="2794918"/>
-                  </a:lnTo>
-                  <a:lnTo>
-                    <a:pt x="5586557" y="2798543"/>
-                  </a:lnTo>
-                  <a:lnTo>
-                    <a:pt x="5658179" y="2802148"/>
-                  </a:lnTo>
-                  <a:lnTo>
-                    <a:pt x="5729802" y="2805735"/>
-                  </a:lnTo>
-                  <a:lnTo>
-                    <a:pt x="5801424" y="2809303"/>
-                  </a:lnTo>
-                  <a:lnTo>
-                    <a:pt x="5873047" y="2812852"/>
-                  </a:lnTo>
-                  <a:lnTo>
-                    <a:pt x="5944669" y="2816382"/>
-                  </a:lnTo>
-                  <a:lnTo>
-                    <a:pt x="6016292" y="2819894"/>
-                  </a:lnTo>
-                  <a:lnTo>
-                    <a:pt x="6087914" y="2823387"/>
-                  </a:lnTo>
-                  <a:lnTo>
-                    <a:pt x="6159537" y="2826862"/>
-                  </a:lnTo>
-                  <a:lnTo>
-                    <a:pt x="6231159" y="2830319"/>
-                  </a:lnTo>
-                  <a:lnTo>
-                    <a:pt x="6302782" y="2833757"/>
-                  </a:lnTo>
-                  <a:lnTo>
-                    <a:pt x="6374404" y="2837177"/>
-                  </a:lnTo>
-                  <a:lnTo>
-                    <a:pt x="6446027" y="2840580"/>
-                  </a:lnTo>
-                  <a:lnTo>
-                    <a:pt x="6517649" y="2843964"/>
-                  </a:lnTo>
-                  <a:lnTo>
-                    <a:pt x="6589272" y="2847331"/>
-                  </a:lnTo>
-                  <a:lnTo>
-                    <a:pt x="6660894" y="2850679"/>
-                  </a:lnTo>
-                  <a:lnTo>
-                    <a:pt x="6732517" y="2854011"/>
-                  </a:lnTo>
-                  <a:lnTo>
-                    <a:pt x="6804139" y="2857325"/>
-                  </a:lnTo>
-                  <a:lnTo>
-                    <a:pt x="6875762" y="2860621"/>
-                  </a:lnTo>
-                  <a:lnTo>
-                    <a:pt x="6947385" y="2863900"/>
-                  </a:lnTo>
-                  <a:lnTo>
-                    <a:pt x="7019007" y="2867161"/>
-                  </a:lnTo>
-                  <a:lnTo>
-                    <a:pt x="7090630" y="2870406"/>
-                  </a:lnTo>
-                  <a:lnTo>
-                    <a:pt x="7090630" y="3391590"/>
-                  </a:lnTo>
-                  <a:lnTo>
-                    <a:pt x="7019007" y="3387981"/>
-                  </a:lnTo>
-                  <a:lnTo>
-                    <a:pt x="6947385" y="3384232"/>
-                  </a:lnTo>
-                  <a:lnTo>
-                    <a:pt x="6875762" y="3380336"/>
-                  </a:lnTo>
-                  <a:lnTo>
-                    <a:pt x="6804139" y="3376287"/>
-                  </a:lnTo>
-                  <a:lnTo>
-                    <a:pt x="6732517" y="3372080"/>
-                  </a:lnTo>
-                  <a:lnTo>
-                    <a:pt x="6660894" y="3367708"/>
-                  </a:lnTo>
-                  <a:lnTo>
-                    <a:pt x="6589272" y="3363165"/>
-                  </a:lnTo>
-                  <a:lnTo>
-                    <a:pt x="6517649" y="3358444"/>
-                  </a:lnTo>
-                  <a:lnTo>
-                    <a:pt x="6446027" y="3353538"/>
-                  </a:lnTo>
-                  <a:lnTo>
-                    <a:pt x="6374404" y="3348440"/>
-                  </a:lnTo>
-                  <a:lnTo>
-                    <a:pt x="6302782" y="3343142"/>
-                  </a:lnTo>
-                  <a:lnTo>
-                    <a:pt x="6231159" y="3337638"/>
-                  </a:lnTo>
-                  <a:lnTo>
-                    <a:pt x="6159537" y="3331917"/>
-                  </a:lnTo>
-                  <a:lnTo>
-                    <a:pt x="6087914" y="3325973"/>
-                  </a:lnTo>
-                  <a:lnTo>
-                    <a:pt x="6016292" y="3319796"/>
-                  </a:lnTo>
-                  <a:lnTo>
-                    <a:pt x="5944669" y="3313377"/>
-                  </a:lnTo>
-                  <a:lnTo>
-                    <a:pt x="5873047" y="3306706"/>
-                  </a:lnTo>
-                  <a:lnTo>
-                    <a:pt x="5801424" y="3299775"/>
-                  </a:lnTo>
-                  <a:lnTo>
-                    <a:pt x="5729802" y="3292572"/>
-                  </a:lnTo>
-                  <a:lnTo>
-                    <a:pt x="5658179" y="3285087"/>
-                  </a:lnTo>
-                  <a:lnTo>
-                    <a:pt x="5586557" y="3277309"/>
-                  </a:lnTo>
-                  <a:lnTo>
-                    <a:pt x="5514934" y="3269227"/>
-                  </a:lnTo>
-                  <a:lnTo>
-                    <a:pt x="5443311" y="3260828"/>
-                  </a:lnTo>
-                  <a:lnTo>
-                    <a:pt x="5371689" y="3252100"/>
-                  </a:lnTo>
-                  <a:lnTo>
-                    <a:pt x="5300066" y="3243031"/>
-                  </a:lnTo>
-                  <a:lnTo>
-                    <a:pt x="5228444" y="3233606"/>
-                  </a:lnTo>
-                  <a:lnTo>
-                    <a:pt x="5156821" y="3223813"/>
-                  </a:lnTo>
-                  <a:lnTo>
-                    <a:pt x="5085199" y="3213636"/>
-                  </a:lnTo>
-                  <a:lnTo>
-                    <a:pt x="5013576" y="3203060"/>
-                  </a:lnTo>
-                  <a:lnTo>
-                    <a:pt x="4941954" y="3192071"/>
-                  </a:lnTo>
-                  <a:lnTo>
-                    <a:pt x="4870331" y="3180651"/>
-                  </a:lnTo>
-                  <a:lnTo>
-                    <a:pt x="4798709" y="3168784"/>
-                  </a:lnTo>
-                  <a:lnTo>
-                    <a:pt x="4727086" y="3156453"/>
-                  </a:lnTo>
-                  <a:lnTo>
-                    <a:pt x="4655464" y="3143639"/>
-                  </a:lnTo>
-                  <a:lnTo>
-                    <a:pt x="4583841" y="3130323"/>
-                  </a:lnTo>
-                  <a:lnTo>
-                    <a:pt x="4512219" y="3116485"/>
-                  </a:lnTo>
-                  <a:lnTo>
-                    <a:pt x="4440596" y="3102106"/>
-                  </a:lnTo>
-                  <a:lnTo>
-                    <a:pt x="4368974" y="3087165"/>
-                  </a:lnTo>
-                  <a:lnTo>
-                    <a:pt x="4297351" y="3071638"/>
-                  </a:lnTo>
-                  <a:lnTo>
-                    <a:pt x="4225729" y="3055503"/>
-                  </a:lnTo>
-                  <a:lnTo>
-                    <a:pt x="4154106" y="3038736"/>
-                  </a:lnTo>
-                  <a:lnTo>
-                    <a:pt x="4082483" y="3021313"/>
-                  </a:lnTo>
-                  <a:lnTo>
-                    <a:pt x="4010861" y="3003208"/>
-                  </a:lnTo>
-                  <a:lnTo>
-                    <a:pt x="3939238" y="2984394"/>
-                  </a:lnTo>
-                  <a:lnTo>
-                    <a:pt x="3867616" y="2964843"/>
-                  </a:lnTo>
-                  <a:lnTo>
-                    <a:pt x="3795993" y="2944527"/>
-                  </a:lnTo>
-                  <a:lnTo>
-                    <a:pt x="3724371" y="2923415"/>
-                  </a:lnTo>
-                  <a:lnTo>
-                    <a:pt x="3652748" y="2901477"/>
-                  </a:lnTo>
-                  <a:lnTo>
-                    <a:pt x="3581126" y="2878680"/>
-                  </a:lnTo>
-                  <a:lnTo>
-                    <a:pt x="3509503" y="2854991"/>
-                  </a:lnTo>
-                  <a:lnTo>
-                    <a:pt x="3437881" y="2830374"/>
-                  </a:lnTo>
-                  <a:lnTo>
-                    <a:pt x="3366258" y="2804793"/>
-                  </a:lnTo>
-                  <a:lnTo>
-                    <a:pt x="3294636" y="2778210"/>
-                  </a:lnTo>
-                  <a:lnTo>
-                    <a:pt x="3223013" y="2750587"/>
-                  </a:lnTo>
-                  <a:lnTo>
-                    <a:pt x="3151391" y="2721882"/>
-                  </a:lnTo>
-                  <a:lnTo>
-                    <a:pt x="3079768" y="2692054"/>
-                  </a:lnTo>
-                  <a:lnTo>
-                    <a:pt x="3008146" y="2661058"/>
-                  </a:lnTo>
-                  <a:lnTo>
-                    <a:pt x="2936523" y="2650834"/>
-                  </a:lnTo>
-                  <a:lnTo>
-                    <a:pt x="2864901" y="2646428"/>
-                  </a:lnTo>
-                  <a:lnTo>
-                    <a:pt x="2793278" y="2641999"/>
-                  </a:lnTo>
-                  <a:lnTo>
-                    <a:pt x="2721655" y="2637546"/>
-                  </a:lnTo>
-                  <a:lnTo>
-                    <a:pt x="2650033" y="2633069"/>
-                  </a:lnTo>
-                  <a:lnTo>
-                    <a:pt x="2578410" y="2628569"/>
-                  </a:lnTo>
-                  <a:lnTo>
-                    <a:pt x="2506788" y="2624045"/>
-                  </a:lnTo>
-                  <a:lnTo>
-                    <a:pt x="2435165" y="2619498"/>
-                  </a:lnTo>
-                  <a:lnTo>
-                    <a:pt x="2363543" y="2614926"/>
-                  </a:lnTo>
-                  <a:lnTo>
-                    <a:pt x="2291920" y="2610330"/>
-                  </a:lnTo>
-                  <a:lnTo>
-                    <a:pt x="2220298" y="2605710"/>
-                  </a:lnTo>
-                  <a:lnTo>
-                    <a:pt x="2148675" y="2601065"/>
-                  </a:lnTo>
-                  <a:lnTo>
-                    <a:pt x="2077053" y="2596395"/>
-                  </a:lnTo>
-                  <a:lnTo>
-                    <a:pt x="2005430" y="2591701"/>
-                  </a:lnTo>
-                  <a:lnTo>
-                    <a:pt x="1933808" y="2586982"/>
-                  </a:lnTo>
-                  <a:lnTo>
-                    <a:pt x="1862185" y="2582239"/>
-                  </a:lnTo>
-                  <a:lnTo>
-                    <a:pt x="1790563" y="2577470"/>
-                  </a:lnTo>
-                  <a:lnTo>
-                    <a:pt x="1718940" y="2572676"/>
-                  </a:lnTo>
-                  <a:lnTo>
-                    <a:pt x="1647318" y="2567856"/>
-                  </a:lnTo>
-                  <a:lnTo>
-                    <a:pt x="1575695" y="2563011"/>
-                  </a:lnTo>
-                  <a:lnTo>
-                    <a:pt x="1504073" y="2558140"/>
-                  </a:lnTo>
-                  <a:lnTo>
-                    <a:pt x="1432450" y="2553244"/>
-                  </a:lnTo>
-                  <a:lnTo>
-                    <a:pt x="1360827" y="2548322"/>
-                  </a:lnTo>
-                  <a:lnTo>
-                    <a:pt x="1289205" y="2543373"/>
-                  </a:lnTo>
-                  <a:lnTo>
-                    <a:pt x="1217582" y="2538399"/>
-                  </a:lnTo>
-                  <a:lnTo>
-                    <a:pt x="1145960" y="2533398"/>
-                  </a:lnTo>
-                  <a:lnTo>
-                    <a:pt x="1074337" y="2528371"/>
-                  </a:lnTo>
-                  <a:lnTo>
-                    <a:pt x="1002715" y="2523317"/>
-                  </a:lnTo>
-                  <a:lnTo>
-                    <a:pt x="931092" y="2518236"/>
-                  </a:lnTo>
-                  <a:lnTo>
-                    <a:pt x="859470" y="2513129"/>
-                  </a:lnTo>
-                  <a:lnTo>
-                    <a:pt x="787847" y="2507994"/>
-                  </a:lnTo>
-                  <a:lnTo>
-                    <a:pt x="716225" y="2502832"/>
-                  </a:lnTo>
-                  <a:lnTo>
-                    <a:pt x="644602" y="2497643"/>
-                  </a:lnTo>
-                  <a:lnTo>
-                    <a:pt x="572980" y="2492427"/>
-                  </a:lnTo>
-                  <a:lnTo>
-                    <a:pt x="501357" y="2487183"/>
-                  </a:lnTo>
-                  <a:lnTo>
-                    <a:pt x="429735" y="2481911"/>
-                  </a:lnTo>
-                  <a:lnTo>
-                    <a:pt x="358112" y="2476612"/>
-                  </a:lnTo>
-                  <a:lnTo>
-                    <a:pt x="286490" y="2471284"/>
-                  </a:lnTo>
-                  <a:lnTo>
-                    <a:pt x="214867" y="2465928"/>
-                  </a:lnTo>
-                  <a:lnTo>
-                    <a:pt x="143245" y="2460544"/>
-                  </a:lnTo>
-                  <a:lnTo>
-                    <a:pt x="71622" y="2455131"/>
-                  </a:lnTo>
-                  <a:lnTo>
-                    <a:pt x="0" y="2449690"/>
+                    <a:pt x="358112" y="36241"/>
+                  </a:lnTo>
+                  <a:lnTo>
+                    <a:pt x="429735" y="166943"/>
+                  </a:lnTo>
+                  <a:lnTo>
+                    <a:pt x="501357" y="292691"/>
+                  </a:lnTo>
+                  <a:lnTo>
+                    <a:pt x="572980" y="413671"/>
+                  </a:lnTo>
+                  <a:lnTo>
+                    <a:pt x="644602" y="530065"/>
+                  </a:lnTo>
+                  <a:lnTo>
+                    <a:pt x="716225" y="642045"/>
+                  </a:lnTo>
+                  <a:lnTo>
+                    <a:pt x="787847" y="749781"/>
+                  </a:lnTo>
+                  <a:lnTo>
+                    <a:pt x="859470" y="853432"/>
+                  </a:lnTo>
+                  <a:lnTo>
+                    <a:pt x="931092" y="953153"/>
+                  </a:lnTo>
+                  <a:lnTo>
+                    <a:pt x="1002715" y="1049093"/>
+                  </a:lnTo>
+                  <a:lnTo>
+                    <a:pt x="1074337" y="1141396"/>
+                  </a:lnTo>
+                  <a:lnTo>
+                    <a:pt x="1145960" y="1230200"/>
+                  </a:lnTo>
+                  <a:lnTo>
+                    <a:pt x="1217582" y="1315637"/>
+                  </a:lnTo>
+                  <a:lnTo>
+                    <a:pt x="1289205" y="1397835"/>
+                  </a:lnTo>
+                  <a:lnTo>
+                    <a:pt x="1360827" y="1476917"/>
+                  </a:lnTo>
+                  <a:lnTo>
+                    <a:pt x="1432450" y="1553000"/>
+                  </a:lnTo>
+                  <a:lnTo>
+                    <a:pt x="1504073" y="1626199"/>
+                  </a:lnTo>
+                  <a:lnTo>
+                    <a:pt x="1575695" y="1696623"/>
+                  </a:lnTo>
+                  <a:lnTo>
+                    <a:pt x="1647318" y="1764377"/>
+                  </a:lnTo>
+                  <a:lnTo>
+                    <a:pt x="1718940" y="1829562"/>
+                  </a:lnTo>
+                  <a:lnTo>
+                    <a:pt x="1790563" y="1892276"/>
+                  </a:lnTo>
+                  <a:lnTo>
+                    <a:pt x="1862185" y="1952612"/>
+                  </a:lnTo>
+                  <a:lnTo>
+                    <a:pt x="1933808" y="2010661"/>
+                  </a:lnTo>
+                  <a:lnTo>
+                    <a:pt x="2005430" y="2066509"/>
+                  </a:lnTo>
+                  <a:lnTo>
+                    <a:pt x="2077053" y="2120240"/>
+                  </a:lnTo>
+                  <a:lnTo>
+                    <a:pt x="2148675" y="2171933"/>
+                  </a:lnTo>
+                  <a:lnTo>
+                    <a:pt x="2220298" y="2221667"/>
+                  </a:lnTo>
+                  <a:lnTo>
+                    <a:pt x="2291920" y="2269515"/>
+                  </a:lnTo>
+                  <a:lnTo>
+                    <a:pt x="2363543" y="2315550"/>
+                  </a:lnTo>
+                  <a:lnTo>
+                    <a:pt x="2435165" y="2359839"/>
+                  </a:lnTo>
+                  <a:lnTo>
+                    <a:pt x="2506788" y="2402449"/>
+                  </a:lnTo>
+                  <a:lnTo>
+                    <a:pt x="2578410" y="2443443"/>
+                  </a:lnTo>
+                  <a:lnTo>
+                    <a:pt x="2650033" y="2482883"/>
+                  </a:lnTo>
+                  <a:lnTo>
+                    <a:pt x="2721655" y="2520828"/>
+                  </a:lnTo>
+                  <a:lnTo>
+                    <a:pt x="2793278" y="2557335"/>
+                  </a:lnTo>
+                  <a:lnTo>
+                    <a:pt x="2864901" y="2592457"/>
+                  </a:lnTo>
+                  <a:lnTo>
+                    <a:pt x="2936523" y="2626248"/>
+                  </a:lnTo>
+                  <a:lnTo>
+                    <a:pt x="3008146" y="2654876"/>
+                  </a:lnTo>
+                  <a:lnTo>
+                    <a:pt x="3079768" y="2659103"/>
+                  </a:lnTo>
+                  <a:lnTo>
+                    <a:pt x="3151391" y="2663308"/>
+                  </a:lnTo>
+                  <a:lnTo>
+                    <a:pt x="3223013" y="2667492"/>
+                  </a:lnTo>
+                  <a:lnTo>
+                    <a:pt x="3294636" y="2671655"/>
+                  </a:lnTo>
+                  <a:lnTo>
+                    <a:pt x="3366258" y="2675796"/>
+                  </a:lnTo>
+                  <a:lnTo>
+                    <a:pt x="3437881" y="2679916"/>
+                  </a:lnTo>
+                  <a:lnTo>
+                    <a:pt x="3509503" y="2684016"/>
+                  </a:lnTo>
+                  <a:lnTo>
+                    <a:pt x="3581126" y="2688094"/>
+                  </a:lnTo>
+                  <a:lnTo>
+                    <a:pt x="3652748" y="2692151"/>
+                  </a:lnTo>
+                  <a:lnTo>
+                    <a:pt x="3724371" y="2696188"/>
+                  </a:lnTo>
+                  <a:lnTo>
+                    <a:pt x="3795993" y="2700205"/>
+                  </a:lnTo>
+                  <a:lnTo>
+                    <a:pt x="3867616" y="2704200"/>
+                  </a:lnTo>
+                  <a:lnTo>
+                    <a:pt x="3939238" y="2708176"/>
+                  </a:lnTo>
+                  <a:lnTo>
+                    <a:pt x="4010861" y="2712131"/>
+                  </a:lnTo>
+                  <a:lnTo>
+                    <a:pt x="4082483" y="2716066"/>
+                  </a:lnTo>
+                  <a:lnTo>
+                    <a:pt x="4154106" y="2719981"/>
+                  </a:lnTo>
+                  <a:lnTo>
+                    <a:pt x="4225729" y="2723875"/>
+                  </a:lnTo>
+                  <a:lnTo>
+                    <a:pt x="4297351" y="2727750"/>
+                  </a:lnTo>
+                  <a:lnTo>
+                    <a:pt x="4368974" y="2731606"/>
+                  </a:lnTo>
+                  <a:lnTo>
+                    <a:pt x="4440596" y="2735441"/>
+                  </a:lnTo>
+                  <a:lnTo>
+                    <a:pt x="4512219" y="2739257"/>
+                  </a:lnTo>
+                  <a:lnTo>
+                    <a:pt x="4583841" y="2743054"/>
+                  </a:lnTo>
+                  <a:lnTo>
+                    <a:pt x="4655464" y="2746831"/>
+                  </a:lnTo>
+                  <a:lnTo>
+                    <a:pt x="4727086" y="2750589"/>
+                  </a:lnTo>
+                  <a:lnTo>
+                    <a:pt x="4798709" y="2754328"/>
+                  </a:lnTo>
+                  <a:lnTo>
+                    <a:pt x="4870331" y="2758048"/>
+                  </a:lnTo>
+                  <a:lnTo>
+                    <a:pt x="4941954" y="2761748"/>
+                  </a:lnTo>
+                  <a:lnTo>
+                    <a:pt x="5013576" y="2765430"/>
+                  </a:lnTo>
+                  <a:lnTo>
+                    <a:pt x="5085199" y="2769094"/>
+                  </a:lnTo>
+                  <a:lnTo>
+                    <a:pt x="5156821" y="2772738"/>
+                  </a:lnTo>
+                  <a:lnTo>
+                    <a:pt x="5228444" y="2776364"/>
+                  </a:lnTo>
+                  <a:lnTo>
+                    <a:pt x="5300066" y="2779971"/>
+                  </a:lnTo>
+                  <a:lnTo>
+                    <a:pt x="5371689" y="2783560"/>
+                  </a:lnTo>
+                  <a:lnTo>
+                    <a:pt x="5443311" y="2787131"/>
+                  </a:lnTo>
+                  <a:lnTo>
+                    <a:pt x="5514934" y="2790683"/>
+                  </a:lnTo>
+                  <a:lnTo>
+                    <a:pt x="5586557" y="2794218"/>
+                  </a:lnTo>
+                  <a:lnTo>
+                    <a:pt x="5658179" y="2797734"/>
+                  </a:lnTo>
+                  <a:lnTo>
+                    <a:pt x="5729802" y="2801232"/>
+                  </a:lnTo>
+                  <a:lnTo>
+                    <a:pt x="5801424" y="2804713"/>
+                  </a:lnTo>
+                  <a:lnTo>
+                    <a:pt x="5873047" y="2808176"/>
+                  </a:lnTo>
+                  <a:lnTo>
+                    <a:pt x="5944669" y="2811621"/>
+                  </a:lnTo>
+                  <a:lnTo>
+                    <a:pt x="6016292" y="2815048"/>
+                  </a:lnTo>
+                  <a:lnTo>
+                    <a:pt x="6087914" y="2818458"/>
+                  </a:lnTo>
+                  <a:lnTo>
+                    <a:pt x="6159537" y="2821851"/>
+                  </a:lnTo>
+                  <a:lnTo>
+                    <a:pt x="6231159" y="2825227"/>
+                  </a:lnTo>
+                  <a:lnTo>
+                    <a:pt x="6302782" y="2828585"/>
+                  </a:lnTo>
+                  <a:lnTo>
+                    <a:pt x="6374404" y="2831926"/>
+                  </a:lnTo>
+                  <a:lnTo>
+                    <a:pt x="6446027" y="2835250"/>
+                  </a:lnTo>
+                  <a:lnTo>
+                    <a:pt x="6517649" y="2838557"/>
+                  </a:lnTo>
+                  <a:lnTo>
+                    <a:pt x="6589272" y="2841847"/>
+                  </a:lnTo>
+                  <a:lnTo>
+                    <a:pt x="6660894" y="2845121"/>
+                  </a:lnTo>
+                  <a:lnTo>
+                    <a:pt x="6732517" y="2848377"/>
+                  </a:lnTo>
+                  <a:lnTo>
+                    <a:pt x="6804139" y="2851617"/>
+                  </a:lnTo>
+                  <a:lnTo>
+                    <a:pt x="6875762" y="2854841"/>
+                  </a:lnTo>
+                  <a:lnTo>
+                    <a:pt x="6947385" y="2858048"/>
+                  </a:lnTo>
+                  <a:lnTo>
+                    <a:pt x="7019007" y="2861239"/>
+                  </a:lnTo>
+                  <a:lnTo>
+                    <a:pt x="7090630" y="2864413"/>
+                  </a:lnTo>
+                  <a:lnTo>
+                    <a:pt x="7090630" y="3392612"/>
+                  </a:lnTo>
+                  <a:lnTo>
+                    <a:pt x="7019007" y="3389020"/>
+                  </a:lnTo>
+                  <a:lnTo>
+                    <a:pt x="6947385" y="3385287"/>
+                  </a:lnTo>
+                  <a:lnTo>
+                    <a:pt x="6875762" y="3381408"/>
+                  </a:lnTo>
+                  <a:lnTo>
+                    <a:pt x="6804139" y="3377375"/>
+                  </a:lnTo>
+                  <a:lnTo>
+                    <a:pt x="6732517" y="3373183"/>
+                  </a:lnTo>
+                  <a:lnTo>
+                    <a:pt x="6660894" y="3368826"/>
+                  </a:lnTo>
+                  <a:lnTo>
+                    <a:pt x="6589272" y="3364298"/>
+                  </a:lnTo>
+                  <a:lnTo>
+                    <a:pt x="6517649" y="3359591"/>
+                  </a:lnTo>
+                  <a:lnTo>
+                    <a:pt x="6446027" y="3354698"/>
+                  </a:lnTo>
+                  <a:lnTo>
+                    <a:pt x="6374404" y="3349613"/>
+                  </a:lnTo>
+                  <a:lnTo>
+                    <a:pt x="6302782" y="3344327"/>
+                  </a:lnTo>
+                  <a:lnTo>
+                    <a:pt x="6231159" y="3338833"/>
+                  </a:lnTo>
+                  <a:lnTo>
+                    <a:pt x="6159537" y="3333122"/>
+                  </a:lnTo>
+                  <a:lnTo>
+                    <a:pt x="6087914" y="3327187"/>
+                  </a:lnTo>
+                  <a:lnTo>
+                    <a:pt x="6016292" y="3321018"/>
+                  </a:lnTo>
+                  <a:lnTo>
+                    <a:pt x="5944669" y="3314605"/>
+                  </a:lnTo>
+                  <a:lnTo>
+                    <a:pt x="5873047" y="3307940"/>
+                  </a:lnTo>
+                  <a:lnTo>
+                    <a:pt x="5801424" y="3301012"/>
+                  </a:lnTo>
+                  <a:lnTo>
+                    <a:pt x="5729802" y="3293811"/>
+                  </a:lnTo>
+                  <a:lnTo>
+                    <a:pt x="5658179" y="3286326"/>
+                  </a:lnTo>
+                  <a:lnTo>
+                    <a:pt x="5586557" y="3278547"/>
+                  </a:lnTo>
+                  <a:lnTo>
+                    <a:pt x="5514934" y="3270461"/>
+                  </a:lnTo>
+                  <a:lnTo>
+                    <a:pt x="5443311" y="3262056"/>
+                  </a:lnTo>
+                  <a:lnTo>
+                    <a:pt x="5371689" y="3253320"/>
+                  </a:lnTo>
+                  <a:lnTo>
+                    <a:pt x="5300066" y="3244240"/>
+                  </a:lnTo>
+                  <a:lnTo>
+                    <a:pt x="5228444" y="3234802"/>
+                  </a:lnTo>
+                  <a:lnTo>
+                    <a:pt x="5156821" y="3224992"/>
+                  </a:lnTo>
+                  <a:lnTo>
+                    <a:pt x="5085199" y="3214795"/>
+                  </a:lnTo>
+                  <a:lnTo>
+                    <a:pt x="5013576" y="3204197"/>
+                  </a:lnTo>
+                  <a:lnTo>
+                    <a:pt x="4941954" y="3193181"/>
+                  </a:lnTo>
+                  <a:lnTo>
+                    <a:pt x="4870331" y="3181731"/>
+                  </a:lnTo>
+                  <a:lnTo>
+                    <a:pt x="4798709" y="3169829"/>
+                  </a:lnTo>
+                  <a:lnTo>
+                    <a:pt x="4727086" y="3157459"/>
+                  </a:lnTo>
+                  <a:lnTo>
+                    <a:pt x="4655464" y="3144601"/>
+                  </a:lnTo>
+                  <a:lnTo>
+                    <a:pt x="4583841" y="3131237"/>
+                  </a:lnTo>
+                  <a:lnTo>
+                    <a:pt x="4512219" y="3117346"/>
+                  </a:lnTo>
+                  <a:lnTo>
+                    <a:pt x="4440596" y="3102907"/>
+                  </a:lnTo>
+                  <a:lnTo>
+                    <a:pt x="4368974" y="3087900"/>
+                  </a:lnTo>
+                  <a:lnTo>
+                    <a:pt x="4297351" y="3072301"/>
+                  </a:lnTo>
+                  <a:lnTo>
+                    <a:pt x="4225729" y="3056087"/>
+                  </a:lnTo>
+                  <a:lnTo>
+                    <a:pt x="4154106" y="3039235"/>
+                  </a:lnTo>
+                  <a:lnTo>
+                    <a:pt x="4082483" y="3021718"/>
+                  </a:lnTo>
+                  <a:lnTo>
+                    <a:pt x="4010861" y="3003512"/>
+                  </a:lnTo>
+                  <a:lnTo>
+                    <a:pt x="3939238" y="2984587"/>
+                  </a:lnTo>
+                  <a:lnTo>
+                    <a:pt x="3867616" y="2964917"/>
+                  </a:lnTo>
+                  <a:lnTo>
+                    <a:pt x="3795993" y="2944472"/>
+                  </a:lnTo>
+                  <a:lnTo>
+                    <a:pt x="3724371" y="2923222"/>
+                  </a:lnTo>
+                  <a:lnTo>
+                    <a:pt x="3652748" y="2901133"/>
+                  </a:lnTo>
+                  <a:lnTo>
+                    <a:pt x="3581126" y="2878175"/>
+                  </a:lnTo>
+                  <a:lnTo>
+                    <a:pt x="3509503" y="2854311"/>
+                  </a:lnTo>
+                  <a:lnTo>
+                    <a:pt x="3437881" y="2829508"/>
+                  </a:lnTo>
+                  <a:lnTo>
+                    <a:pt x="3366258" y="2803727"/>
+                  </a:lnTo>
+                  <a:lnTo>
+                    <a:pt x="3294636" y="2776930"/>
+                  </a:lnTo>
+                  <a:lnTo>
+                    <a:pt x="3223013" y="2749077"/>
+                  </a:lnTo>
+                  <a:lnTo>
+                    <a:pt x="3151391" y="2720126"/>
+                  </a:lnTo>
+                  <a:lnTo>
+                    <a:pt x="3079768" y="2690035"/>
+                  </a:lnTo>
+                  <a:lnTo>
+                    <a:pt x="3008146" y="2658758"/>
+                  </a:lnTo>
+                  <a:lnTo>
+                    <a:pt x="2936523" y="2650628"/>
+                  </a:lnTo>
+                  <a:lnTo>
+                    <a:pt x="2864901" y="2646357"/>
+                  </a:lnTo>
+                  <a:lnTo>
+                    <a:pt x="2793278" y="2642065"/>
+                  </a:lnTo>
+                  <a:lnTo>
+                    <a:pt x="2721655" y="2637751"/>
+                  </a:lnTo>
+                  <a:lnTo>
+                    <a:pt x="2650033" y="2633414"/>
+                  </a:lnTo>
+                  <a:lnTo>
+                    <a:pt x="2578410" y="2629056"/>
+                  </a:lnTo>
+                  <a:lnTo>
+                    <a:pt x="2506788" y="2624675"/>
+                  </a:lnTo>
+                  <a:lnTo>
+                    <a:pt x="2435165" y="2620272"/>
+                  </a:lnTo>
+                  <a:lnTo>
+                    <a:pt x="2363543" y="2615846"/>
+                  </a:lnTo>
+                  <a:lnTo>
+                    <a:pt x="2291920" y="2611397"/>
+                  </a:lnTo>
+                  <a:lnTo>
+                    <a:pt x="2220298" y="2606926"/>
+                  </a:lnTo>
+                  <a:lnTo>
+                    <a:pt x="2148675" y="2602431"/>
+                  </a:lnTo>
+                  <a:lnTo>
+                    <a:pt x="2077053" y="2597914"/>
+                  </a:lnTo>
+                  <a:lnTo>
+                    <a:pt x="2005430" y="2593373"/>
+                  </a:lnTo>
+                  <a:lnTo>
+                    <a:pt x="1933808" y="2588809"/>
+                  </a:lnTo>
+                  <a:lnTo>
+                    <a:pt x="1862185" y="2584222"/>
+                  </a:lnTo>
+                  <a:lnTo>
+                    <a:pt x="1790563" y="2579612"/>
+                  </a:lnTo>
+                  <a:lnTo>
+                    <a:pt x="1718940" y="2574977"/>
+                  </a:lnTo>
+                  <a:lnTo>
+                    <a:pt x="1647318" y="2570319"/>
+                  </a:lnTo>
+                  <a:lnTo>
+                    <a:pt x="1575695" y="2565637"/>
+                  </a:lnTo>
+                  <a:lnTo>
+                    <a:pt x="1504073" y="2560931"/>
+                  </a:lnTo>
+                  <a:lnTo>
+                    <a:pt x="1432450" y="2556201"/>
+                  </a:lnTo>
+                  <a:lnTo>
+                    <a:pt x="1360827" y="2551447"/>
+                  </a:lnTo>
+                  <a:lnTo>
+                    <a:pt x="1289205" y="2546668"/>
+                  </a:lnTo>
+                  <a:lnTo>
+                    <a:pt x="1217582" y="2541865"/>
+                  </a:lnTo>
+                  <a:lnTo>
+                    <a:pt x="1145960" y="2537037"/>
+                  </a:lnTo>
+                  <a:lnTo>
+                    <a:pt x="1074337" y="2532184"/>
+                  </a:lnTo>
+                  <a:lnTo>
+                    <a:pt x="1002715" y="2527307"/>
+                  </a:lnTo>
+                  <a:lnTo>
+                    <a:pt x="931092" y="2522404"/>
+                  </a:lnTo>
+                  <a:lnTo>
+                    <a:pt x="859470" y="2517477"/>
+                  </a:lnTo>
+                  <a:lnTo>
+                    <a:pt x="787847" y="2512524"/>
+                  </a:lnTo>
+                  <a:lnTo>
+                    <a:pt x="716225" y="2507546"/>
+                  </a:lnTo>
+                  <a:lnTo>
+                    <a:pt x="644602" y="2502542"/>
+                  </a:lnTo>
+                  <a:lnTo>
+                    <a:pt x="572980" y="2497513"/>
+                  </a:lnTo>
+                  <a:lnTo>
+                    <a:pt x="501357" y="2492457"/>
+                  </a:lnTo>
+                  <a:lnTo>
+                    <a:pt x="429735" y="2487376"/>
+                  </a:lnTo>
+                  <a:lnTo>
+                    <a:pt x="358112" y="2482269"/>
+                  </a:lnTo>
+                  <a:lnTo>
+                    <a:pt x="286490" y="2477136"/>
+                  </a:lnTo>
+                  <a:lnTo>
+                    <a:pt x="214867" y="2471976"/>
+                  </a:lnTo>
+                  <a:lnTo>
+                    <a:pt x="143245" y="2466790"/>
+                  </a:lnTo>
+                  <a:lnTo>
+                    <a:pt x="71622" y="2461578"/>
+                  </a:lnTo>
+                  <a:lnTo>
+                    <a:pt x="0" y="2456338"/>
                   </a:lnTo>
                   <a:close/>
                 </a:path>
@@ -4008,300 +4008,300 @@
           </p:nvSpPr>
           <p:spPr>
             <a:xfrm>
-              <a:off x="1488910" y="2073503"/>
-              <a:ext cx="6773769" cy="2870406"/>
+              <a:off x="1511055" y="2073503"/>
+              <a:ext cx="6751623" cy="2864413"/>
             </a:xfrm>
             <a:custGeom>
               <a:avLst/>
               <a:pathLst>
-                <a:path w="6773769" h="2870406">
+                <a:path w="6751623" h="2864413">
                   <a:moveTo>
                     <a:pt x="0" y="0"/>
                   </a:moveTo>
                   <a:lnTo>
-                    <a:pt x="41251" y="76825"/>
-                  </a:lnTo>
-                  <a:lnTo>
-                    <a:pt x="112874" y="205188"/>
-                  </a:lnTo>
-                  <a:lnTo>
-                    <a:pt x="184496" y="328714"/>
-                  </a:lnTo>
-                  <a:lnTo>
-                    <a:pt x="256119" y="447586"/>
-                  </a:lnTo>
-                  <a:lnTo>
-                    <a:pt x="327741" y="561979"/>
-                  </a:lnTo>
-                  <a:lnTo>
-                    <a:pt x="399364" y="672062"/>
-                  </a:lnTo>
-                  <a:lnTo>
-                    <a:pt x="470986" y="777997"/>
-                  </a:lnTo>
-                  <a:lnTo>
-                    <a:pt x="542609" y="879942"/>
-                  </a:lnTo>
-                  <a:lnTo>
-                    <a:pt x="614231" y="978045"/>
-                  </a:lnTo>
-                  <a:lnTo>
-                    <a:pt x="685854" y="1072452"/>
-                  </a:lnTo>
-                  <a:lnTo>
-                    <a:pt x="757476" y="1163302"/>
-                  </a:lnTo>
-                  <a:lnTo>
-                    <a:pt x="829099" y="1250729"/>
-                  </a:lnTo>
-                  <a:lnTo>
-                    <a:pt x="900721" y="1334863"/>
-                  </a:lnTo>
-                  <a:lnTo>
-                    <a:pt x="972344" y="1415826"/>
-                  </a:lnTo>
-                  <a:lnTo>
-                    <a:pt x="1043967" y="1493739"/>
-                  </a:lnTo>
-                  <a:lnTo>
-                    <a:pt x="1115589" y="1568716"/>
-                  </a:lnTo>
-                  <a:lnTo>
-                    <a:pt x="1187212" y="1640868"/>
-                  </a:lnTo>
-                  <a:lnTo>
-                    <a:pt x="1258834" y="1710302"/>
-                  </a:lnTo>
-                  <a:lnTo>
-                    <a:pt x="1330457" y="1777120"/>
-                  </a:lnTo>
-                  <a:lnTo>
-                    <a:pt x="1402079" y="1841421"/>
-                  </a:lnTo>
-                  <a:lnTo>
-                    <a:pt x="1473702" y="1903298"/>
-                  </a:lnTo>
-                  <a:lnTo>
-                    <a:pt x="1545324" y="1962845"/>
-                  </a:lnTo>
-                  <a:lnTo>
-                    <a:pt x="1616947" y="2020148"/>
-                  </a:lnTo>
-                  <a:lnTo>
-                    <a:pt x="1688569" y="2075292"/>
-                  </a:lnTo>
-                  <a:lnTo>
-                    <a:pt x="1760192" y="2128358"/>
-                  </a:lnTo>
-                  <a:lnTo>
-                    <a:pt x="1831814" y="2179425"/>
-                  </a:lnTo>
-                  <a:lnTo>
-                    <a:pt x="1903437" y="2228567"/>
-                  </a:lnTo>
-                  <a:lnTo>
-                    <a:pt x="1975059" y="2275859"/>
-                  </a:lnTo>
-                  <a:lnTo>
-                    <a:pt x="2046682" y="2321368"/>
-                  </a:lnTo>
-                  <a:lnTo>
-                    <a:pt x="2118304" y="2365163"/>
-                  </a:lnTo>
-                  <a:lnTo>
-                    <a:pt x="2189927" y="2407308"/>
-                  </a:lnTo>
-                  <a:lnTo>
-                    <a:pt x="2261549" y="2447865"/>
-                  </a:lnTo>
-                  <a:lnTo>
-                    <a:pt x="2333172" y="2486893"/>
-                  </a:lnTo>
-                  <a:lnTo>
-                    <a:pt x="2404795" y="2524452"/>
-                  </a:lnTo>
-                  <a:lnTo>
-                    <a:pt x="2476417" y="2560595"/>
-                  </a:lnTo>
-                  <a:lnTo>
-                    <a:pt x="2548040" y="2595377"/>
-                  </a:lnTo>
-                  <a:lnTo>
-                    <a:pt x="2619662" y="2628848"/>
-                  </a:lnTo>
-                  <a:lnTo>
-                    <a:pt x="2691285" y="2655217"/>
-                  </a:lnTo>
-                  <a:lnTo>
-                    <a:pt x="2762907" y="2659577"/>
-                  </a:lnTo>
-                  <a:lnTo>
-                    <a:pt x="2834530" y="2663914"/>
-                  </a:lnTo>
-                  <a:lnTo>
-                    <a:pt x="2906152" y="2668228"/>
-                  </a:lnTo>
-                  <a:lnTo>
-                    <a:pt x="2977775" y="2672519"/>
-                  </a:lnTo>
-                  <a:lnTo>
-                    <a:pt x="3049397" y="2676788"/>
-                  </a:lnTo>
-                  <a:lnTo>
-                    <a:pt x="3121020" y="2681034"/>
-                  </a:lnTo>
-                  <a:lnTo>
-                    <a:pt x="3192642" y="2685258"/>
-                  </a:lnTo>
-                  <a:lnTo>
-                    <a:pt x="3264265" y="2689460"/>
-                  </a:lnTo>
-                  <a:lnTo>
-                    <a:pt x="3335887" y="2693639"/>
-                  </a:lnTo>
-                  <a:lnTo>
-                    <a:pt x="3407510" y="2697797"/>
-                  </a:lnTo>
-                  <a:lnTo>
-                    <a:pt x="3479132" y="2701933"/>
-                  </a:lnTo>
-                  <a:lnTo>
-                    <a:pt x="3550755" y="2706047"/>
-                  </a:lnTo>
-                  <a:lnTo>
-                    <a:pt x="3622377" y="2710139"/>
-                  </a:lnTo>
-                  <a:lnTo>
-                    <a:pt x="3694000" y="2714210"/>
-                  </a:lnTo>
-                  <a:lnTo>
-                    <a:pt x="3765623" y="2718259"/>
-                  </a:lnTo>
-                  <a:lnTo>
-                    <a:pt x="3837245" y="2722287"/>
-                  </a:lnTo>
-                  <a:lnTo>
-                    <a:pt x="3908868" y="2726294"/>
-                  </a:lnTo>
-                  <a:lnTo>
-                    <a:pt x="3980490" y="2730280"/>
-                  </a:lnTo>
-                  <a:lnTo>
-                    <a:pt x="4052113" y="2734245"/>
-                  </a:lnTo>
-                  <a:lnTo>
-                    <a:pt x="4123735" y="2738189"/>
-                  </a:lnTo>
-                  <a:lnTo>
-                    <a:pt x="4195358" y="2742112"/>
-                  </a:lnTo>
-                  <a:lnTo>
-                    <a:pt x="4266980" y="2746015"/>
-                  </a:lnTo>
-                  <a:lnTo>
-                    <a:pt x="4338603" y="2749897"/>
-                  </a:lnTo>
-                  <a:lnTo>
-                    <a:pt x="4410225" y="2753758"/>
-                  </a:lnTo>
-                  <a:lnTo>
-                    <a:pt x="4481848" y="2757600"/>
-                  </a:lnTo>
-                  <a:lnTo>
-                    <a:pt x="4553470" y="2761421"/>
-                  </a:lnTo>
-                  <a:lnTo>
-                    <a:pt x="4625093" y="2765222"/>
-                  </a:lnTo>
-                  <a:lnTo>
-                    <a:pt x="4696715" y="2769002"/>
-                  </a:lnTo>
-                  <a:lnTo>
-                    <a:pt x="4768338" y="2772764"/>
-                  </a:lnTo>
-                  <a:lnTo>
-                    <a:pt x="4839960" y="2776505"/>
-                  </a:lnTo>
-                  <a:lnTo>
-                    <a:pt x="4911583" y="2780226"/>
-                  </a:lnTo>
-                  <a:lnTo>
-                    <a:pt x="4983205" y="2783928"/>
-                  </a:lnTo>
-                  <a:lnTo>
-                    <a:pt x="5054828" y="2787611"/>
-                  </a:lnTo>
-                  <a:lnTo>
-                    <a:pt x="5126451" y="2791274"/>
-                  </a:lnTo>
-                  <a:lnTo>
-                    <a:pt x="5198073" y="2794918"/>
-                  </a:lnTo>
-                  <a:lnTo>
-                    <a:pt x="5269696" y="2798543"/>
-                  </a:lnTo>
-                  <a:lnTo>
-                    <a:pt x="5341318" y="2802148"/>
-                  </a:lnTo>
-                  <a:lnTo>
-                    <a:pt x="5412941" y="2805735"/>
-                  </a:lnTo>
-                  <a:lnTo>
-                    <a:pt x="5484563" y="2809303"/>
-                  </a:lnTo>
-                  <a:lnTo>
-                    <a:pt x="5556186" y="2812852"/>
-                  </a:lnTo>
-                  <a:lnTo>
-                    <a:pt x="5627808" y="2816382"/>
-                  </a:lnTo>
-                  <a:lnTo>
-                    <a:pt x="5699431" y="2819894"/>
-                  </a:lnTo>
-                  <a:lnTo>
-                    <a:pt x="5771053" y="2823387"/>
-                  </a:lnTo>
-                  <a:lnTo>
-                    <a:pt x="5842676" y="2826862"/>
-                  </a:lnTo>
-                  <a:lnTo>
-                    <a:pt x="5914298" y="2830319"/>
-                  </a:lnTo>
-                  <a:lnTo>
-                    <a:pt x="5985921" y="2833757"/>
-                  </a:lnTo>
-                  <a:lnTo>
-                    <a:pt x="6057543" y="2837177"/>
-                  </a:lnTo>
-                  <a:lnTo>
-                    <a:pt x="6129166" y="2840580"/>
-                  </a:lnTo>
-                  <a:lnTo>
-                    <a:pt x="6200788" y="2843964"/>
-                  </a:lnTo>
-                  <a:lnTo>
-                    <a:pt x="6272411" y="2847331"/>
-                  </a:lnTo>
-                  <a:lnTo>
-                    <a:pt x="6344033" y="2850679"/>
-                  </a:lnTo>
-                  <a:lnTo>
-                    <a:pt x="6415656" y="2854011"/>
-                  </a:lnTo>
-                  <a:lnTo>
-                    <a:pt x="6487279" y="2857325"/>
-                  </a:lnTo>
-                  <a:lnTo>
-                    <a:pt x="6558901" y="2860621"/>
-                  </a:lnTo>
-                  <a:lnTo>
-                    <a:pt x="6630524" y="2863900"/>
-                  </a:lnTo>
-                  <a:lnTo>
-                    <a:pt x="6702146" y="2867161"/>
-                  </a:lnTo>
-                  <a:lnTo>
-                    <a:pt x="6773769" y="2870406"/>
+                    <a:pt x="19106" y="36241"/>
+                  </a:lnTo>
+                  <a:lnTo>
+                    <a:pt x="90729" y="166943"/>
+                  </a:lnTo>
+                  <a:lnTo>
+                    <a:pt x="162351" y="292691"/>
+                  </a:lnTo>
+                  <a:lnTo>
+                    <a:pt x="233974" y="413671"/>
+                  </a:lnTo>
+                  <a:lnTo>
+                    <a:pt x="305596" y="530065"/>
+                  </a:lnTo>
+                  <a:lnTo>
+                    <a:pt x="377219" y="642045"/>
+                  </a:lnTo>
+                  <a:lnTo>
+                    <a:pt x="448841" y="749781"/>
+                  </a:lnTo>
+                  <a:lnTo>
+                    <a:pt x="520464" y="853432"/>
+                  </a:lnTo>
+                  <a:lnTo>
+                    <a:pt x="592086" y="953153"/>
+                  </a:lnTo>
+                  <a:lnTo>
+                    <a:pt x="663709" y="1049093"/>
+                  </a:lnTo>
+                  <a:lnTo>
+                    <a:pt x="735331" y="1141396"/>
+                  </a:lnTo>
+                  <a:lnTo>
+                    <a:pt x="806954" y="1230200"/>
+                  </a:lnTo>
+                  <a:lnTo>
+                    <a:pt x="878576" y="1315637"/>
+                  </a:lnTo>
+                  <a:lnTo>
+                    <a:pt x="950199" y="1397835"/>
+                  </a:lnTo>
+                  <a:lnTo>
+                    <a:pt x="1021821" y="1476917"/>
+                  </a:lnTo>
+                  <a:lnTo>
+                    <a:pt x="1093444" y="1553000"/>
+                  </a:lnTo>
+                  <a:lnTo>
+                    <a:pt x="1165066" y="1626199"/>
+                  </a:lnTo>
+                  <a:lnTo>
+                    <a:pt x="1236689" y="1696623"/>
+                  </a:lnTo>
+                  <a:lnTo>
+                    <a:pt x="1308312" y="1764377"/>
+                  </a:lnTo>
+                  <a:lnTo>
+                    <a:pt x="1379934" y="1829562"/>
+                  </a:lnTo>
+                  <a:lnTo>
+                    <a:pt x="1451557" y="1892276"/>
+                  </a:lnTo>
+                  <a:lnTo>
+                    <a:pt x="1523179" y="1952612"/>
+                  </a:lnTo>
+                  <a:lnTo>
+                    <a:pt x="1594802" y="2010661"/>
+                  </a:lnTo>
+                  <a:lnTo>
+                    <a:pt x="1666424" y="2066509"/>
+                  </a:lnTo>
+                  <a:lnTo>
+                    <a:pt x="1738047" y="2120240"/>
+                  </a:lnTo>
+                  <a:lnTo>
+                    <a:pt x="1809669" y="2171933"/>
+                  </a:lnTo>
+                  <a:lnTo>
+                    <a:pt x="1881292" y="2221667"/>
+                  </a:lnTo>
+                  <a:lnTo>
+                    <a:pt x="1952914" y="2269515"/>
+                  </a:lnTo>
+                  <a:lnTo>
+                    <a:pt x="2024537" y="2315550"/>
+                  </a:lnTo>
+                  <a:lnTo>
+                    <a:pt x="2096159" y="2359839"/>
+                  </a:lnTo>
+                  <a:lnTo>
+                    <a:pt x="2167782" y="2402449"/>
+                  </a:lnTo>
+                  <a:lnTo>
+                    <a:pt x="2239404" y="2443443"/>
+                  </a:lnTo>
+                  <a:lnTo>
+                    <a:pt x="2311027" y="2482883"/>
+                  </a:lnTo>
+                  <a:lnTo>
+                    <a:pt x="2382649" y="2520828"/>
+                  </a:lnTo>
+                  <a:lnTo>
+                    <a:pt x="2454272" y="2557335"/>
+                  </a:lnTo>
+                  <a:lnTo>
+                    <a:pt x="2525894" y="2592457"/>
+                  </a:lnTo>
+                  <a:lnTo>
+                    <a:pt x="2597517" y="2626248"/>
+                  </a:lnTo>
+                  <a:lnTo>
+                    <a:pt x="2669139" y="2654876"/>
+                  </a:lnTo>
+                  <a:lnTo>
+                    <a:pt x="2740762" y="2659103"/>
+                  </a:lnTo>
+                  <a:lnTo>
+                    <a:pt x="2812385" y="2663308"/>
+                  </a:lnTo>
+                  <a:lnTo>
+                    <a:pt x="2884007" y="2667492"/>
+                  </a:lnTo>
+                  <a:lnTo>
+                    <a:pt x="2955630" y="2671655"/>
+                  </a:lnTo>
+                  <a:lnTo>
+                    <a:pt x="3027252" y="2675796"/>
+                  </a:lnTo>
+                  <a:lnTo>
+                    <a:pt x="3098875" y="2679916"/>
+                  </a:lnTo>
+                  <a:lnTo>
+                    <a:pt x="3170497" y="2684016"/>
+                  </a:lnTo>
+                  <a:lnTo>
+                    <a:pt x="3242120" y="2688094"/>
+                  </a:lnTo>
+                  <a:lnTo>
+                    <a:pt x="3313742" y="2692151"/>
+                  </a:lnTo>
+                  <a:lnTo>
+                    <a:pt x="3385365" y="2696188"/>
+                  </a:lnTo>
+                  <a:lnTo>
+                    <a:pt x="3456987" y="2700205"/>
+                  </a:lnTo>
+                  <a:lnTo>
+                    <a:pt x="3528610" y="2704200"/>
+                  </a:lnTo>
+                  <a:lnTo>
+                    <a:pt x="3600232" y="2708176"/>
+                  </a:lnTo>
+                  <a:lnTo>
+                    <a:pt x="3671855" y="2712131"/>
+                  </a:lnTo>
+                  <a:lnTo>
+                    <a:pt x="3743477" y="2716066"/>
+                  </a:lnTo>
+                  <a:lnTo>
+                    <a:pt x="3815100" y="2719981"/>
+                  </a:lnTo>
+                  <a:lnTo>
+                    <a:pt x="3886722" y="2723875"/>
+                  </a:lnTo>
+                  <a:lnTo>
+                    <a:pt x="3958345" y="2727750"/>
+                  </a:lnTo>
+                  <a:lnTo>
+                    <a:pt x="4029967" y="2731606"/>
+                  </a:lnTo>
+                  <a:lnTo>
+                    <a:pt x="4101590" y="2735441"/>
+                  </a:lnTo>
+                  <a:lnTo>
+                    <a:pt x="4173213" y="2739257"/>
+                  </a:lnTo>
+                  <a:lnTo>
+                    <a:pt x="4244835" y="2743054"/>
+                  </a:lnTo>
+                  <a:lnTo>
+                    <a:pt x="4316458" y="2746831"/>
+                  </a:lnTo>
+                  <a:lnTo>
+                    <a:pt x="4388080" y="2750589"/>
+                  </a:lnTo>
+                  <a:lnTo>
+                    <a:pt x="4459703" y="2754328"/>
+                  </a:lnTo>
+                  <a:lnTo>
+                    <a:pt x="4531325" y="2758048"/>
+                  </a:lnTo>
+                  <a:lnTo>
+                    <a:pt x="4602948" y="2761748"/>
+                  </a:lnTo>
+                  <a:lnTo>
+                    <a:pt x="4674570" y="2765430"/>
+                  </a:lnTo>
+                  <a:lnTo>
+                    <a:pt x="4746193" y="2769094"/>
+                  </a:lnTo>
+                  <a:lnTo>
+                    <a:pt x="4817815" y="2772738"/>
+                  </a:lnTo>
+                  <a:lnTo>
+                    <a:pt x="4889438" y="2776364"/>
+                  </a:lnTo>
+                  <a:lnTo>
+                    <a:pt x="4961060" y="2779971"/>
+                  </a:lnTo>
+                  <a:lnTo>
+                    <a:pt x="5032683" y="2783560"/>
+                  </a:lnTo>
+                  <a:lnTo>
+                    <a:pt x="5104305" y="2787131"/>
+                  </a:lnTo>
+                  <a:lnTo>
+                    <a:pt x="5175928" y="2790683"/>
+                  </a:lnTo>
+                  <a:lnTo>
+                    <a:pt x="5247550" y="2794218"/>
+                  </a:lnTo>
+                  <a:lnTo>
+                    <a:pt x="5319173" y="2797734"/>
+                  </a:lnTo>
+                  <a:lnTo>
+                    <a:pt x="5390795" y="2801232"/>
+                  </a:lnTo>
+                  <a:lnTo>
+                    <a:pt x="5462418" y="2804713"/>
+                  </a:lnTo>
+                  <a:lnTo>
+                    <a:pt x="5534041" y="2808176"/>
+                  </a:lnTo>
+                  <a:lnTo>
+                    <a:pt x="5605663" y="2811621"/>
+                  </a:lnTo>
+                  <a:lnTo>
+                    <a:pt x="5677286" y="2815048"/>
+                  </a:lnTo>
+                  <a:lnTo>
+                    <a:pt x="5748908" y="2818458"/>
+                  </a:lnTo>
+                  <a:lnTo>
+                    <a:pt x="5820531" y="2821851"/>
+                  </a:lnTo>
+                  <a:lnTo>
+                    <a:pt x="5892153" y="2825227"/>
+                  </a:lnTo>
+                  <a:lnTo>
+                    <a:pt x="5963776" y="2828585"/>
+                  </a:lnTo>
+                  <a:lnTo>
+                    <a:pt x="6035398" y="2831926"/>
+                  </a:lnTo>
+                  <a:lnTo>
+                    <a:pt x="6107021" y="2835250"/>
+                  </a:lnTo>
+                  <a:lnTo>
+                    <a:pt x="6178643" y="2838557"/>
+                  </a:lnTo>
+                  <a:lnTo>
+                    <a:pt x="6250266" y="2841847"/>
+                  </a:lnTo>
+                  <a:lnTo>
+                    <a:pt x="6321888" y="2845121"/>
+                  </a:lnTo>
+                  <a:lnTo>
+                    <a:pt x="6393511" y="2848377"/>
+                  </a:lnTo>
+                  <a:lnTo>
+                    <a:pt x="6465133" y="2851617"/>
+                  </a:lnTo>
+                  <a:lnTo>
+                    <a:pt x="6536756" y="2854841"/>
+                  </a:lnTo>
+                  <a:lnTo>
+                    <a:pt x="6608378" y="2858048"/>
+                  </a:lnTo>
+                  <a:lnTo>
+                    <a:pt x="6680001" y="2861239"/>
+                  </a:lnTo>
+                  <a:lnTo>
+                    <a:pt x="6751623" y="2864413"/>
                   </a:lnTo>
                 </a:path>
               </a:pathLst>
@@ -4321,309 +4321,309 @@
           </p:nvSpPr>
           <p:spPr>
             <a:xfrm>
-              <a:off x="1172049" y="4523193"/>
-              <a:ext cx="7090630" cy="941899"/>
+              <a:off x="1172049" y="4529841"/>
+              <a:ext cx="7090630" cy="936273"/>
             </a:xfrm>
             <a:custGeom>
               <a:avLst/>
               <a:pathLst>
-                <a:path w="7090630" h="941899">
+                <a:path w="7090630" h="936273">
                   <a:moveTo>
-                    <a:pt x="7090630" y="941899"/>
+                    <a:pt x="7090630" y="936273"/>
                   </a:moveTo>
                   <a:lnTo>
-                    <a:pt x="7019007" y="938291"/>
-                  </a:lnTo>
-                  <a:lnTo>
-                    <a:pt x="6947385" y="934542"/>
-                  </a:lnTo>
-                  <a:lnTo>
-                    <a:pt x="6875762" y="930646"/>
-                  </a:lnTo>
-                  <a:lnTo>
-                    <a:pt x="6804139" y="926597"/>
-                  </a:lnTo>
-                  <a:lnTo>
-                    <a:pt x="6732517" y="922390"/>
-                  </a:lnTo>
-                  <a:lnTo>
-                    <a:pt x="6660894" y="918018"/>
-                  </a:lnTo>
-                  <a:lnTo>
-                    <a:pt x="6589272" y="913475"/>
-                  </a:lnTo>
-                  <a:lnTo>
-                    <a:pt x="6517649" y="908754"/>
-                  </a:lnTo>
-                  <a:lnTo>
-                    <a:pt x="6446027" y="903848"/>
-                  </a:lnTo>
-                  <a:lnTo>
-                    <a:pt x="6374404" y="898750"/>
-                  </a:lnTo>
-                  <a:lnTo>
-                    <a:pt x="6302782" y="893452"/>
-                  </a:lnTo>
-                  <a:lnTo>
-                    <a:pt x="6231159" y="887947"/>
-                  </a:lnTo>
-                  <a:lnTo>
-                    <a:pt x="6159537" y="882227"/>
-                  </a:lnTo>
-                  <a:lnTo>
-                    <a:pt x="6087914" y="876282"/>
-                  </a:lnTo>
-                  <a:lnTo>
-                    <a:pt x="6016292" y="870105"/>
-                  </a:lnTo>
-                  <a:lnTo>
-                    <a:pt x="5944669" y="863686"/>
-                  </a:lnTo>
-                  <a:lnTo>
-                    <a:pt x="5873047" y="857016"/>
-                  </a:lnTo>
-                  <a:lnTo>
-                    <a:pt x="5801424" y="850084"/>
-                  </a:lnTo>
-                  <a:lnTo>
-                    <a:pt x="5729802" y="842882"/>
-                  </a:lnTo>
-                  <a:lnTo>
-                    <a:pt x="5658179" y="835397"/>
-                  </a:lnTo>
-                  <a:lnTo>
-                    <a:pt x="5586557" y="827619"/>
-                  </a:lnTo>
-                  <a:lnTo>
-                    <a:pt x="5514934" y="819536"/>
-                  </a:lnTo>
-                  <a:lnTo>
-                    <a:pt x="5443311" y="811137"/>
-                  </a:lnTo>
-                  <a:lnTo>
-                    <a:pt x="5371689" y="802410"/>
-                  </a:lnTo>
-                  <a:lnTo>
-                    <a:pt x="5300066" y="793340"/>
-                  </a:lnTo>
-                  <a:lnTo>
-                    <a:pt x="5228444" y="783916"/>
-                  </a:lnTo>
-                  <a:lnTo>
-                    <a:pt x="5156821" y="774122"/>
-                  </a:lnTo>
-                  <a:lnTo>
-                    <a:pt x="5085199" y="763945"/>
-                  </a:lnTo>
-                  <a:lnTo>
-                    <a:pt x="5013576" y="753370"/>
-                  </a:lnTo>
-                  <a:lnTo>
-                    <a:pt x="4941954" y="742381"/>
-                  </a:lnTo>
-                  <a:lnTo>
-                    <a:pt x="4870331" y="730961"/>
-                  </a:lnTo>
-                  <a:lnTo>
-                    <a:pt x="4798709" y="719094"/>
-                  </a:lnTo>
-                  <a:lnTo>
-                    <a:pt x="4727086" y="706763"/>
-                  </a:lnTo>
-                  <a:lnTo>
-                    <a:pt x="4655464" y="693948"/>
-                  </a:lnTo>
-                  <a:lnTo>
-                    <a:pt x="4583841" y="680633"/>
-                  </a:lnTo>
-                  <a:lnTo>
-                    <a:pt x="4512219" y="666795"/>
-                  </a:lnTo>
-                  <a:lnTo>
-                    <a:pt x="4440596" y="652416"/>
-                  </a:lnTo>
-                  <a:lnTo>
-                    <a:pt x="4368974" y="637474"/>
-                  </a:lnTo>
-                  <a:lnTo>
-                    <a:pt x="4297351" y="621947"/>
-                  </a:lnTo>
-                  <a:lnTo>
-                    <a:pt x="4225729" y="605812"/>
-                  </a:lnTo>
-                  <a:lnTo>
-                    <a:pt x="4154106" y="589046"/>
-                  </a:lnTo>
-                  <a:lnTo>
-                    <a:pt x="4082483" y="571623"/>
-                  </a:lnTo>
-                  <a:lnTo>
-                    <a:pt x="4010861" y="553517"/>
-                  </a:lnTo>
-                  <a:lnTo>
-                    <a:pt x="3939238" y="534703"/>
-                  </a:lnTo>
-                  <a:lnTo>
-                    <a:pt x="3867616" y="515153"/>
-                  </a:lnTo>
-                  <a:lnTo>
-                    <a:pt x="3795993" y="494837"/>
-                  </a:lnTo>
-                  <a:lnTo>
-                    <a:pt x="3724371" y="473725"/>
-                  </a:lnTo>
-                  <a:lnTo>
-                    <a:pt x="3652748" y="451787"/>
-                  </a:lnTo>
-                  <a:lnTo>
-                    <a:pt x="3581126" y="428990"/>
-                  </a:lnTo>
-                  <a:lnTo>
-                    <a:pt x="3509503" y="405300"/>
-                  </a:lnTo>
-                  <a:lnTo>
-                    <a:pt x="3437881" y="380683"/>
-                  </a:lnTo>
-                  <a:lnTo>
-                    <a:pt x="3366258" y="355102"/>
-                  </a:lnTo>
-                  <a:lnTo>
-                    <a:pt x="3294636" y="328520"/>
-                  </a:lnTo>
-                  <a:lnTo>
-                    <a:pt x="3223013" y="300897"/>
-                  </a:lnTo>
-                  <a:lnTo>
-                    <a:pt x="3151391" y="272192"/>
-                  </a:lnTo>
-                  <a:lnTo>
-                    <a:pt x="3079768" y="242364"/>
-                  </a:lnTo>
-                  <a:lnTo>
-                    <a:pt x="3008146" y="211367"/>
-                  </a:lnTo>
-                  <a:lnTo>
-                    <a:pt x="2936523" y="201144"/>
-                  </a:lnTo>
-                  <a:lnTo>
-                    <a:pt x="2864901" y="196738"/>
-                  </a:lnTo>
-                  <a:lnTo>
-                    <a:pt x="2793278" y="192308"/>
-                  </a:lnTo>
-                  <a:lnTo>
-                    <a:pt x="2721655" y="187855"/>
-                  </a:lnTo>
-                  <a:lnTo>
-                    <a:pt x="2650033" y="183379"/>
-                  </a:lnTo>
-                  <a:lnTo>
-                    <a:pt x="2578410" y="178879"/>
-                  </a:lnTo>
-                  <a:lnTo>
-                    <a:pt x="2506788" y="174355"/>
-                  </a:lnTo>
-                  <a:lnTo>
-                    <a:pt x="2435165" y="169807"/>
-                  </a:lnTo>
-                  <a:lnTo>
-                    <a:pt x="2363543" y="165236"/>
-                  </a:lnTo>
-                  <a:lnTo>
-                    <a:pt x="2291920" y="160640"/>
-                  </a:lnTo>
-                  <a:lnTo>
-                    <a:pt x="2220298" y="156019"/>
-                  </a:lnTo>
-                  <a:lnTo>
-                    <a:pt x="2148675" y="151374"/>
-                  </a:lnTo>
-                  <a:lnTo>
-                    <a:pt x="2077053" y="146705"/>
-                  </a:lnTo>
-                  <a:lnTo>
-                    <a:pt x="2005430" y="142011"/>
-                  </a:lnTo>
-                  <a:lnTo>
-                    <a:pt x="1933808" y="137292"/>
-                  </a:lnTo>
-                  <a:lnTo>
-                    <a:pt x="1862185" y="132548"/>
-                  </a:lnTo>
-                  <a:lnTo>
-                    <a:pt x="1790563" y="127779"/>
-                  </a:lnTo>
-                  <a:lnTo>
-                    <a:pt x="1718940" y="122985"/>
-                  </a:lnTo>
-                  <a:lnTo>
-                    <a:pt x="1647318" y="118166"/>
-                  </a:lnTo>
-                  <a:lnTo>
-                    <a:pt x="1575695" y="113321"/>
-                  </a:lnTo>
-                  <a:lnTo>
-                    <a:pt x="1504073" y="108450"/>
-                  </a:lnTo>
-                  <a:lnTo>
-                    <a:pt x="1432450" y="103554"/>
-                  </a:lnTo>
-                  <a:lnTo>
-                    <a:pt x="1360827" y="98631"/>
-                  </a:lnTo>
-                  <a:lnTo>
-                    <a:pt x="1289205" y="93683"/>
-                  </a:lnTo>
-                  <a:lnTo>
-                    <a:pt x="1217582" y="88709"/>
-                  </a:lnTo>
-                  <a:lnTo>
-                    <a:pt x="1145960" y="83708"/>
-                  </a:lnTo>
-                  <a:lnTo>
-                    <a:pt x="1074337" y="78680"/>
-                  </a:lnTo>
-                  <a:lnTo>
-                    <a:pt x="1002715" y="73627"/>
-                  </a:lnTo>
-                  <a:lnTo>
-                    <a:pt x="931092" y="68546"/>
-                  </a:lnTo>
-                  <a:lnTo>
-                    <a:pt x="859470" y="63438"/>
-                  </a:lnTo>
-                  <a:lnTo>
-                    <a:pt x="787847" y="58304"/>
-                  </a:lnTo>
-                  <a:lnTo>
-                    <a:pt x="716225" y="53142"/>
-                  </a:lnTo>
-                  <a:lnTo>
-                    <a:pt x="644602" y="47953"/>
-                  </a:lnTo>
-                  <a:lnTo>
-                    <a:pt x="572980" y="42737"/>
-                  </a:lnTo>
-                  <a:lnTo>
-                    <a:pt x="501357" y="37493"/>
-                  </a:lnTo>
-                  <a:lnTo>
-                    <a:pt x="429735" y="32221"/>
-                  </a:lnTo>
-                  <a:lnTo>
-                    <a:pt x="358112" y="26921"/>
-                  </a:lnTo>
-                  <a:lnTo>
-                    <a:pt x="286490" y="21594"/>
-                  </a:lnTo>
-                  <a:lnTo>
-                    <a:pt x="214867" y="16238"/>
-                  </a:lnTo>
-                  <a:lnTo>
-                    <a:pt x="143245" y="10854"/>
-                  </a:lnTo>
-                  <a:lnTo>
-                    <a:pt x="71622" y="5441"/>
+                    <a:pt x="7019007" y="932682"/>
+                  </a:lnTo>
+                  <a:lnTo>
+                    <a:pt x="6947385" y="928949"/>
+                  </a:lnTo>
+                  <a:lnTo>
+                    <a:pt x="6875762" y="925069"/>
+                  </a:lnTo>
+                  <a:lnTo>
+                    <a:pt x="6804139" y="921036"/>
+                  </a:lnTo>
+                  <a:lnTo>
+                    <a:pt x="6732517" y="916844"/>
+                  </a:lnTo>
+                  <a:lnTo>
+                    <a:pt x="6660894" y="912487"/>
+                  </a:lnTo>
+                  <a:lnTo>
+                    <a:pt x="6589272" y="907959"/>
+                  </a:lnTo>
+                  <a:lnTo>
+                    <a:pt x="6517649" y="903252"/>
+                  </a:lnTo>
+                  <a:lnTo>
+                    <a:pt x="6446027" y="898359"/>
+                  </a:lnTo>
+                  <a:lnTo>
+                    <a:pt x="6374404" y="893274"/>
+                  </a:lnTo>
+                  <a:lnTo>
+                    <a:pt x="6302782" y="887988"/>
+                  </a:lnTo>
+                  <a:lnTo>
+                    <a:pt x="6231159" y="882494"/>
+                  </a:lnTo>
+                  <a:lnTo>
+                    <a:pt x="6159537" y="876784"/>
+                  </a:lnTo>
+                  <a:lnTo>
+                    <a:pt x="6087914" y="870848"/>
+                  </a:lnTo>
+                  <a:lnTo>
+                    <a:pt x="6016292" y="864679"/>
+                  </a:lnTo>
+                  <a:lnTo>
+                    <a:pt x="5944669" y="858266"/>
+                  </a:lnTo>
+                  <a:lnTo>
+                    <a:pt x="5873047" y="851601"/>
+                  </a:lnTo>
+                  <a:lnTo>
+                    <a:pt x="5801424" y="844673"/>
+                  </a:lnTo>
+                  <a:lnTo>
+                    <a:pt x="5729802" y="837472"/>
+                  </a:lnTo>
+                  <a:lnTo>
+                    <a:pt x="5658179" y="829988"/>
+                  </a:lnTo>
+                  <a:lnTo>
+                    <a:pt x="5586557" y="822208"/>
+                  </a:lnTo>
+                  <a:lnTo>
+                    <a:pt x="5514934" y="814122"/>
+                  </a:lnTo>
+                  <a:lnTo>
+                    <a:pt x="5443311" y="805717"/>
+                  </a:lnTo>
+                  <a:lnTo>
+                    <a:pt x="5371689" y="796981"/>
+                  </a:lnTo>
+                  <a:lnTo>
+                    <a:pt x="5300066" y="787901"/>
+                  </a:lnTo>
+                  <a:lnTo>
+                    <a:pt x="5228444" y="778463"/>
+                  </a:lnTo>
+                  <a:lnTo>
+                    <a:pt x="5156821" y="768653"/>
+                  </a:lnTo>
+                  <a:lnTo>
+                    <a:pt x="5085199" y="758456"/>
+                  </a:lnTo>
+                  <a:lnTo>
+                    <a:pt x="5013576" y="747858"/>
+                  </a:lnTo>
+                  <a:lnTo>
+                    <a:pt x="4941954" y="736842"/>
+                  </a:lnTo>
+                  <a:lnTo>
+                    <a:pt x="4870331" y="725392"/>
+                  </a:lnTo>
+                  <a:lnTo>
+                    <a:pt x="4798709" y="713491"/>
+                  </a:lnTo>
+                  <a:lnTo>
+                    <a:pt x="4727086" y="701120"/>
+                  </a:lnTo>
+                  <a:lnTo>
+                    <a:pt x="4655464" y="688263"/>
+                  </a:lnTo>
+                  <a:lnTo>
+                    <a:pt x="4583841" y="674898"/>
+                  </a:lnTo>
+                  <a:lnTo>
+                    <a:pt x="4512219" y="661007"/>
+                  </a:lnTo>
+                  <a:lnTo>
+                    <a:pt x="4440596" y="646569"/>
+                  </a:lnTo>
+                  <a:lnTo>
+                    <a:pt x="4368974" y="631561"/>
+                  </a:lnTo>
+                  <a:lnTo>
+                    <a:pt x="4297351" y="615962"/>
+                  </a:lnTo>
+                  <a:lnTo>
+                    <a:pt x="4225729" y="599749"/>
+                  </a:lnTo>
+                  <a:lnTo>
+                    <a:pt x="4154106" y="582896"/>
+                  </a:lnTo>
+                  <a:lnTo>
+                    <a:pt x="4082483" y="565380"/>
+                  </a:lnTo>
+                  <a:lnTo>
+                    <a:pt x="4010861" y="547173"/>
+                  </a:lnTo>
+                  <a:lnTo>
+                    <a:pt x="3939238" y="528249"/>
+                  </a:lnTo>
+                  <a:lnTo>
+                    <a:pt x="3867616" y="508579"/>
+                  </a:lnTo>
+                  <a:lnTo>
+                    <a:pt x="3795993" y="488134"/>
+                  </a:lnTo>
+                  <a:lnTo>
+                    <a:pt x="3724371" y="466883"/>
+                  </a:lnTo>
+                  <a:lnTo>
+                    <a:pt x="3652748" y="444795"/>
+                  </a:lnTo>
+                  <a:lnTo>
+                    <a:pt x="3581126" y="421836"/>
+                  </a:lnTo>
+                  <a:lnTo>
+                    <a:pt x="3509503" y="397973"/>
+                  </a:lnTo>
+                  <a:lnTo>
+                    <a:pt x="3437881" y="373169"/>
+                  </a:lnTo>
+                  <a:lnTo>
+                    <a:pt x="3366258" y="347388"/>
+                  </a:lnTo>
+                  <a:lnTo>
+                    <a:pt x="3294636" y="320591"/>
+                  </a:lnTo>
+                  <a:lnTo>
+                    <a:pt x="3223013" y="292738"/>
+                  </a:lnTo>
+                  <a:lnTo>
+                    <a:pt x="3151391" y="263787"/>
+                  </a:lnTo>
+                  <a:lnTo>
+                    <a:pt x="3079768" y="233696"/>
+                  </a:lnTo>
+                  <a:lnTo>
+                    <a:pt x="3008146" y="202419"/>
+                  </a:lnTo>
+                  <a:lnTo>
+                    <a:pt x="2936523" y="194289"/>
+                  </a:lnTo>
+                  <a:lnTo>
+                    <a:pt x="2864901" y="190019"/>
+                  </a:lnTo>
+                  <a:lnTo>
+                    <a:pt x="2793278" y="185726"/>
+                  </a:lnTo>
+                  <a:lnTo>
+                    <a:pt x="2721655" y="181412"/>
+                  </a:lnTo>
+                  <a:lnTo>
+                    <a:pt x="2650033" y="177076"/>
+                  </a:lnTo>
+                  <a:lnTo>
+                    <a:pt x="2578410" y="172717"/>
+                  </a:lnTo>
+                  <a:lnTo>
+                    <a:pt x="2506788" y="168336"/>
+                  </a:lnTo>
+                  <a:lnTo>
+                    <a:pt x="2435165" y="163933"/>
+                  </a:lnTo>
+                  <a:lnTo>
+                    <a:pt x="2363543" y="159507"/>
+                  </a:lnTo>
+                  <a:lnTo>
+                    <a:pt x="2291920" y="155058"/>
+                  </a:lnTo>
+                  <a:lnTo>
+                    <a:pt x="2220298" y="150587"/>
+                  </a:lnTo>
+                  <a:lnTo>
+                    <a:pt x="2148675" y="146093"/>
+                  </a:lnTo>
+                  <a:lnTo>
+                    <a:pt x="2077053" y="141575"/>
+                  </a:lnTo>
+                  <a:lnTo>
+                    <a:pt x="2005430" y="137035"/>
+                  </a:lnTo>
+                  <a:lnTo>
+                    <a:pt x="1933808" y="132471"/>
+                  </a:lnTo>
+                  <a:lnTo>
+                    <a:pt x="1862185" y="127884"/>
+                  </a:lnTo>
+                  <a:lnTo>
+                    <a:pt x="1790563" y="123273"/>
+                  </a:lnTo>
+                  <a:lnTo>
+                    <a:pt x="1718940" y="118639"/>
+                  </a:lnTo>
+                  <a:lnTo>
+                    <a:pt x="1647318" y="113980"/>
+                  </a:lnTo>
+                  <a:lnTo>
+                    <a:pt x="1575695" y="109298"/>
+                  </a:lnTo>
+                  <a:lnTo>
+                    <a:pt x="1504073" y="104592"/>
+                  </a:lnTo>
+                  <a:lnTo>
+                    <a:pt x="1432450" y="99862"/>
+                  </a:lnTo>
+                  <a:lnTo>
+                    <a:pt x="1360827" y="95108"/>
+                  </a:lnTo>
+                  <a:lnTo>
+                    <a:pt x="1289205" y="90329"/>
+                  </a:lnTo>
+                  <a:lnTo>
+                    <a:pt x="1217582" y="85526"/>
+                  </a:lnTo>
+                  <a:lnTo>
+                    <a:pt x="1145960" y="80698"/>
+                  </a:lnTo>
+                  <a:lnTo>
+                    <a:pt x="1074337" y="75846"/>
+                  </a:lnTo>
+                  <a:lnTo>
+                    <a:pt x="1002715" y="70968"/>
+                  </a:lnTo>
+                  <a:lnTo>
+                    <a:pt x="931092" y="66066"/>
+                  </a:lnTo>
+                  <a:lnTo>
+                    <a:pt x="859470" y="61138"/>
+                  </a:lnTo>
+                  <a:lnTo>
+                    <a:pt x="787847" y="56185"/>
+                  </a:lnTo>
+                  <a:lnTo>
+                    <a:pt x="716225" y="51207"/>
+                  </a:lnTo>
+                  <a:lnTo>
+                    <a:pt x="644602" y="46203"/>
+                  </a:lnTo>
+                  <a:lnTo>
+                    <a:pt x="572980" y="41174"/>
+                  </a:lnTo>
+                  <a:lnTo>
+                    <a:pt x="501357" y="36119"/>
+                  </a:lnTo>
+                  <a:lnTo>
+                    <a:pt x="429735" y="31038"/>
+                  </a:lnTo>
+                  <a:lnTo>
+                    <a:pt x="358112" y="25931"/>
+                  </a:lnTo>
+                  <a:lnTo>
+                    <a:pt x="286490" y="20797"/>
+                  </a:lnTo>
+                  <a:lnTo>
+                    <a:pt x="214867" y="15638"/>
+                  </a:lnTo>
+                  <a:lnTo>
+                    <a:pt x="143245" y="10452"/>
+                  </a:lnTo>
+                  <a:lnTo>
+                    <a:pt x="71622" y="5239"/>
                   </a:lnTo>
                   <a:lnTo>
                     <a:pt x="0" y="0"/>
@@ -4646,312 +4646,312 @@
           </p:nvSpPr>
           <p:spPr>
             <a:xfrm>
-              <a:off x="1172049" y="3491151"/>
-              <a:ext cx="7090630" cy="1828351"/>
+              <a:off x="1172049" y="3484307"/>
+              <a:ext cx="7090630" cy="1835365"/>
             </a:xfrm>
             <a:custGeom>
               <a:avLst/>
               <a:pathLst>
-                <a:path w="7090630" h="1828351">
+                <a:path w="7090630" h="1835365">
                   <a:moveTo>
                     <a:pt x="0" y="0"/>
                   </a:moveTo>
                   <a:lnTo>
-                    <a:pt x="71622" y="44635"/>
-                  </a:lnTo>
-                  <a:lnTo>
-                    <a:pt x="143245" y="88306"/>
-                  </a:lnTo>
-                  <a:lnTo>
-                    <a:pt x="214867" y="131034"/>
-                  </a:lnTo>
-                  <a:lnTo>
-                    <a:pt x="286490" y="172838"/>
-                  </a:lnTo>
-                  <a:lnTo>
-                    <a:pt x="358112" y="213740"/>
-                  </a:lnTo>
-                  <a:lnTo>
-                    <a:pt x="429735" y="253758"/>
-                  </a:lnTo>
-                  <a:lnTo>
-                    <a:pt x="501357" y="292911"/>
-                  </a:lnTo>
-                  <a:lnTo>
-                    <a:pt x="572980" y="331219"/>
-                  </a:lnTo>
-                  <a:lnTo>
-                    <a:pt x="644602" y="368698"/>
-                  </a:lnTo>
-                  <a:lnTo>
-                    <a:pt x="716225" y="405369"/>
-                  </a:lnTo>
-                  <a:lnTo>
-                    <a:pt x="787847" y="441247"/>
-                  </a:lnTo>
-                  <a:lnTo>
-                    <a:pt x="859470" y="476349"/>
-                  </a:lnTo>
-                  <a:lnTo>
-                    <a:pt x="931092" y="510694"/>
-                  </a:lnTo>
-                  <a:lnTo>
-                    <a:pt x="1002715" y="544296"/>
-                  </a:lnTo>
-                  <a:lnTo>
-                    <a:pt x="1074337" y="577173"/>
-                  </a:lnTo>
-                  <a:lnTo>
-                    <a:pt x="1145960" y="609339"/>
-                  </a:lnTo>
-                  <a:lnTo>
-                    <a:pt x="1217582" y="640811"/>
-                  </a:lnTo>
-                  <a:lnTo>
-                    <a:pt x="1289205" y="671602"/>
-                  </a:lnTo>
-                  <a:lnTo>
-                    <a:pt x="1360827" y="701729"/>
-                  </a:lnTo>
-                  <a:lnTo>
-                    <a:pt x="1432450" y="731204"/>
-                  </a:lnTo>
-                  <a:lnTo>
-                    <a:pt x="1504073" y="760043"/>
-                  </a:lnTo>
-                  <a:lnTo>
-                    <a:pt x="1575695" y="788258"/>
-                  </a:lnTo>
-                  <a:lnTo>
-                    <a:pt x="1647318" y="815865"/>
-                  </a:lnTo>
-                  <a:lnTo>
-                    <a:pt x="1718940" y="842874"/>
-                  </a:lnTo>
-                  <a:lnTo>
-                    <a:pt x="1790563" y="869300"/>
-                  </a:lnTo>
-                  <a:lnTo>
-                    <a:pt x="1862185" y="895156"/>
-                  </a:lnTo>
-                  <a:lnTo>
-                    <a:pt x="1933808" y="920452"/>
-                  </a:lnTo>
-                  <a:lnTo>
-                    <a:pt x="2005430" y="945203"/>
-                  </a:lnTo>
-                  <a:lnTo>
-                    <a:pt x="2077053" y="969418"/>
-                  </a:lnTo>
-                  <a:lnTo>
-                    <a:pt x="2148675" y="993111"/>
-                  </a:lnTo>
-                  <a:lnTo>
-                    <a:pt x="2220298" y="1016291"/>
-                  </a:lnTo>
-                  <a:lnTo>
-                    <a:pt x="2291920" y="1038971"/>
-                  </a:lnTo>
-                  <a:lnTo>
-                    <a:pt x="2363543" y="1061161"/>
-                  </a:lnTo>
-                  <a:lnTo>
-                    <a:pt x="2435165" y="1082871"/>
-                  </a:lnTo>
-                  <a:lnTo>
-                    <a:pt x="2506788" y="1104112"/>
-                  </a:lnTo>
-                  <a:lnTo>
-                    <a:pt x="2578410" y="1124895"/>
-                  </a:lnTo>
-                  <a:lnTo>
-                    <a:pt x="2650033" y="1145228"/>
-                  </a:lnTo>
-                  <a:lnTo>
-                    <a:pt x="2721655" y="1165123"/>
-                  </a:lnTo>
-                  <a:lnTo>
-                    <a:pt x="2793278" y="1184587"/>
-                  </a:lnTo>
-                  <a:lnTo>
-                    <a:pt x="2864901" y="1203631"/>
-                  </a:lnTo>
-                  <a:lnTo>
-                    <a:pt x="2936523" y="1222263"/>
-                  </a:lnTo>
-                  <a:lnTo>
-                    <a:pt x="3008146" y="1240493"/>
-                  </a:lnTo>
-                  <a:lnTo>
-                    <a:pt x="3079768" y="1258330"/>
-                  </a:lnTo>
-                  <a:lnTo>
-                    <a:pt x="3151391" y="1275780"/>
-                  </a:lnTo>
-                  <a:lnTo>
-                    <a:pt x="3223013" y="1292854"/>
-                  </a:lnTo>
-                  <a:lnTo>
-                    <a:pt x="3294636" y="1309559"/>
-                  </a:lnTo>
-                  <a:lnTo>
-                    <a:pt x="3366258" y="1325903"/>
-                  </a:lnTo>
-                  <a:lnTo>
-                    <a:pt x="3437881" y="1341894"/>
-                  </a:lnTo>
-                  <a:lnTo>
-                    <a:pt x="3509503" y="1357540"/>
-                  </a:lnTo>
-                  <a:lnTo>
-                    <a:pt x="3581126" y="1372847"/>
-                  </a:lnTo>
-                  <a:lnTo>
-                    <a:pt x="3652748" y="1387824"/>
-                  </a:lnTo>
-                  <a:lnTo>
-                    <a:pt x="3724371" y="1402477"/>
-                  </a:lnTo>
-                  <a:lnTo>
-                    <a:pt x="3795993" y="1416814"/>
-                  </a:lnTo>
-                  <a:lnTo>
-                    <a:pt x="3867616" y="1430841"/>
-                  </a:lnTo>
-                  <a:lnTo>
-                    <a:pt x="3939238" y="1444565"/>
-                  </a:lnTo>
-                  <a:lnTo>
-                    <a:pt x="4010861" y="1457992"/>
-                  </a:lnTo>
-                  <a:lnTo>
-                    <a:pt x="4082483" y="1471130"/>
-                  </a:lnTo>
-                  <a:lnTo>
-                    <a:pt x="4154106" y="1483983"/>
-                  </a:lnTo>
-                  <a:lnTo>
-                    <a:pt x="4225729" y="1496559"/>
-                  </a:lnTo>
-                  <a:lnTo>
-                    <a:pt x="4297351" y="1508863"/>
-                  </a:lnTo>
-                  <a:lnTo>
-                    <a:pt x="4368974" y="1520901"/>
-                  </a:lnTo>
-                  <a:lnTo>
-                    <a:pt x="4440596" y="1532680"/>
-                  </a:lnTo>
-                  <a:lnTo>
-                    <a:pt x="4512219" y="1544204"/>
-                  </a:lnTo>
-                  <a:lnTo>
-                    <a:pt x="4583841" y="1555478"/>
-                  </a:lnTo>
-                  <a:lnTo>
-                    <a:pt x="4655464" y="1566510"/>
-                  </a:lnTo>
-                  <a:lnTo>
-                    <a:pt x="4727086" y="1577303"/>
-                  </a:lnTo>
-                  <a:lnTo>
-                    <a:pt x="4798709" y="1587862"/>
-                  </a:lnTo>
-                  <a:lnTo>
-                    <a:pt x="4870331" y="1598194"/>
-                  </a:lnTo>
-                  <a:lnTo>
-                    <a:pt x="4941954" y="1608303"/>
-                  </a:lnTo>
-                  <a:lnTo>
-                    <a:pt x="5013576" y="1618193"/>
-                  </a:lnTo>
-                  <a:lnTo>
-                    <a:pt x="5085199" y="1627869"/>
-                  </a:lnTo>
-                  <a:lnTo>
-                    <a:pt x="5156821" y="1637336"/>
-                  </a:lnTo>
-                  <a:lnTo>
-                    <a:pt x="5228444" y="1646599"/>
-                  </a:lnTo>
-                  <a:lnTo>
-                    <a:pt x="5300066" y="1655662"/>
-                  </a:lnTo>
-                  <a:lnTo>
-                    <a:pt x="5371689" y="1664529"/>
-                  </a:lnTo>
-                  <a:lnTo>
-                    <a:pt x="5443311" y="1673204"/>
-                  </a:lnTo>
-                  <a:lnTo>
-                    <a:pt x="5514934" y="1681692"/>
-                  </a:lnTo>
-                  <a:lnTo>
-                    <a:pt x="5586557" y="1689997"/>
-                  </a:lnTo>
-                  <a:lnTo>
-                    <a:pt x="5658179" y="1698122"/>
-                  </a:lnTo>
-                  <a:lnTo>
-                    <a:pt x="5729802" y="1706072"/>
-                  </a:lnTo>
-                  <a:lnTo>
-                    <a:pt x="5801424" y="1713850"/>
-                  </a:lnTo>
-                  <a:lnTo>
-                    <a:pt x="5873047" y="1721460"/>
-                  </a:lnTo>
-                  <a:lnTo>
-                    <a:pt x="5944669" y="1728905"/>
-                  </a:lnTo>
-                  <a:lnTo>
-                    <a:pt x="6016292" y="1736190"/>
-                  </a:lnTo>
-                  <a:lnTo>
-                    <a:pt x="6087914" y="1743317"/>
-                  </a:lnTo>
-                  <a:lnTo>
-                    <a:pt x="6159537" y="1750290"/>
-                  </a:lnTo>
-                  <a:lnTo>
-                    <a:pt x="6231159" y="1757113"/>
-                  </a:lnTo>
-                  <a:lnTo>
-                    <a:pt x="6302782" y="1763788"/>
-                  </a:lnTo>
-                  <a:lnTo>
-                    <a:pt x="6374404" y="1770319"/>
-                  </a:lnTo>
-                  <a:lnTo>
-                    <a:pt x="6446027" y="1776709"/>
-                  </a:lnTo>
-                  <a:lnTo>
-                    <a:pt x="6517649" y="1782961"/>
-                  </a:lnTo>
-                  <a:lnTo>
-                    <a:pt x="6589272" y="1789078"/>
-                  </a:lnTo>
-                  <a:lnTo>
-                    <a:pt x="6660894" y="1795062"/>
-                  </a:lnTo>
-                  <a:lnTo>
-                    <a:pt x="6732517" y="1800918"/>
-                  </a:lnTo>
-                  <a:lnTo>
-                    <a:pt x="6804139" y="1806647"/>
-                  </a:lnTo>
-                  <a:lnTo>
-                    <a:pt x="6875762" y="1812252"/>
-                  </a:lnTo>
-                  <a:lnTo>
-                    <a:pt x="6947385" y="1817736"/>
-                  </a:lnTo>
-                  <a:lnTo>
-                    <a:pt x="7019007" y="1823101"/>
-                  </a:lnTo>
-                  <a:lnTo>
-                    <a:pt x="7090630" y="1828351"/>
+                    <a:pt x="71622" y="44865"/>
+                  </a:lnTo>
+                  <a:lnTo>
+                    <a:pt x="143245" y="88760"/>
+                  </a:lnTo>
+                  <a:lnTo>
+                    <a:pt x="214867" y="131704"/>
+                  </a:lnTo>
+                  <a:lnTo>
+                    <a:pt x="286490" y="173720"/>
+                  </a:lnTo>
+                  <a:lnTo>
+                    <a:pt x="358112" y="214825"/>
+                  </a:lnTo>
+                  <a:lnTo>
+                    <a:pt x="429735" y="255042"/>
+                  </a:lnTo>
+                  <a:lnTo>
+                    <a:pt x="501357" y="294387"/>
+                  </a:lnTo>
+                  <a:lnTo>
+                    <a:pt x="572980" y="332881"/>
+                  </a:lnTo>
+                  <a:lnTo>
+                    <a:pt x="644602" y="370542"/>
+                  </a:lnTo>
+                  <a:lnTo>
+                    <a:pt x="716225" y="407388"/>
+                  </a:lnTo>
+                  <a:lnTo>
+                    <a:pt x="787847" y="443437"/>
+                  </a:lnTo>
+                  <a:lnTo>
+                    <a:pt x="859470" y="478705"/>
+                  </a:lnTo>
+                  <a:lnTo>
+                    <a:pt x="931092" y="513210"/>
+                  </a:lnTo>
+                  <a:lnTo>
+                    <a:pt x="1002715" y="546968"/>
+                  </a:lnTo>
+                  <a:lnTo>
+                    <a:pt x="1074337" y="579995"/>
+                  </a:lnTo>
+                  <a:lnTo>
+                    <a:pt x="1145960" y="612308"/>
+                  </a:lnTo>
+                  <a:lnTo>
+                    <a:pt x="1217582" y="643921"/>
+                  </a:lnTo>
+                  <a:lnTo>
+                    <a:pt x="1289205" y="674850"/>
+                  </a:lnTo>
+                  <a:lnTo>
+                    <a:pt x="1360827" y="705109"/>
+                  </a:lnTo>
+                  <a:lnTo>
+                    <a:pt x="1432450" y="734714"/>
+                  </a:lnTo>
+                  <a:lnTo>
+                    <a:pt x="1504073" y="763678"/>
+                  </a:lnTo>
+                  <a:lnTo>
+                    <a:pt x="1575695" y="792015"/>
+                  </a:lnTo>
+                  <a:lnTo>
+                    <a:pt x="1647318" y="819739"/>
+                  </a:lnTo>
+                  <a:lnTo>
+                    <a:pt x="1718940" y="846862"/>
+                  </a:lnTo>
+                  <a:lnTo>
+                    <a:pt x="1790563" y="873399"/>
+                  </a:lnTo>
+                  <a:lnTo>
+                    <a:pt x="1862185" y="899361"/>
+                  </a:lnTo>
+                  <a:lnTo>
+                    <a:pt x="1933808" y="924762"/>
+                  </a:lnTo>
+                  <a:lnTo>
+                    <a:pt x="2005430" y="949612"/>
+                  </a:lnTo>
+                  <a:lnTo>
+                    <a:pt x="2077053" y="973925"/>
+                  </a:lnTo>
+                  <a:lnTo>
+                    <a:pt x="2148675" y="997712"/>
+                  </a:lnTo>
+                  <a:lnTo>
+                    <a:pt x="2220298" y="1020983"/>
+                  </a:lnTo>
+                  <a:lnTo>
+                    <a:pt x="2291920" y="1043752"/>
+                  </a:lnTo>
+                  <a:lnTo>
+                    <a:pt x="2363543" y="1066027"/>
+                  </a:lnTo>
+                  <a:lnTo>
+                    <a:pt x="2435165" y="1087820"/>
+                  </a:lnTo>
+                  <a:lnTo>
+                    <a:pt x="2506788" y="1109141"/>
+                  </a:lnTo>
+                  <a:lnTo>
+                    <a:pt x="2578410" y="1130001"/>
+                  </a:lnTo>
+                  <a:lnTo>
+                    <a:pt x="2650033" y="1150410"/>
+                  </a:lnTo>
+                  <a:lnTo>
+                    <a:pt x="2721655" y="1170377"/>
+                  </a:lnTo>
+                  <a:lnTo>
+                    <a:pt x="2793278" y="1189911"/>
+                  </a:lnTo>
+                  <a:lnTo>
+                    <a:pt x="2864901" y="1209023"/>
+                  </a:lnTo>
+                  <a:lnTo>
+                    <a:pt x="2936523" y="1227722"/>
+                  </a:lnTo>
+                  <a:lnTo>
+                    <a:pt x="3008146" y="1246015"/>
+                  </a:lnTo>
+                  <a:lnTo>
+                    <a:pt x="3079768" y="1263913"/>
+                  </a:lnTo>
+                  <a:lnTo>
+                    <a:pt x="3151391" y="1281423"/>
+                  </a:lnTo>
+                  <a:lnTo>
+                    <a:pt x="3223013" y="1298554"/>
+                  </a:lnTo>
+                  <a:lnTo>
+                    <a:pt x="3294636" y="1315315"/>
+                  </a:lnTo>
+                  <a:lnTo>
+                    <a:pt x="3366258" y="1331712"/>
+                  </a:lnTo>
+                  <a:lnTo>
+                    <a:pt x="3437881" y="1347755"/>
+                  </a:lnTo>
+                  <a:lnTo>
+                    <a:pt x="3509503" y="1363451"/>
+                  </a:lnTo>
+                  <a:lnTo>
+                    <a:pt x="3581126" y="1378807"/>
+                  </a:lnTo>
+                  <a:lnTo>
+                    <a:pt x="3652748" y="1393830"/>
+                  </a:lnTo>
+                  <a:lnTo>
+                    <a:pt x="3724371" y="1408528"/>
+                  </a:lnTo>
+                  <a:lnTo>
+                    <a:pt x="3795993" y="1422909"/>
+                  </a:lnTo>
+                  <a:lnTo>
+                    <a:pt x="3867616" y="1436978"/>
+                  </a:lnTo>
+                  <a:lnTo>
+                    <a:pt x="3939238" y="1450742"/>
+                  </a:lnTo>
+                  <a:lnTo>
+                    <a:pt x="4010861" y="1464209"/>
+                  </a:lnTo>
+                  <a:lnTo>
+                    <a:pt x="4082483" y="1477384"/>
+                  </a:lnTo>
+                  <a:lnTo>
+                    <a:pt x="4154106" y="1490274"/>
+                  </a:lnTo>
+                  <a:lnTo>
+                    <a:pt x="4225729" y="1502885"/>
+                  </a:lnTo>
+                  <a:lnTo>
+                    <a:pt x="4297351" y="1515223"/>
+                  </a:lnTo>
+                  <a:lnTo>
+                    <a:pt x="4368974" y="1527294"/>
+                  </a:lnTo>
+                  <a:lnTo>
+                    <a:pt x="4440596" y="1539103"/>
+                  </a:lnTo>
+                  <a:lnTo>
+                    <a:pt x="4512219" y="1550658"/>
+                  </a:lnTo>
+                  <a:lnTo>
+                    <a:pt x="4583841" y="1561962"/>
+                  </a:lnTo>
+                  <a:lnTo>
+                    <a:pt x="4655464" y="1573021"/>
+                  </a:lnTo>
+                  <a:lnTo>
+                    <a:pt x="4727086" y="1583841"/>
+                  </a:lnTo>
+                  <a:lnTo>
+                    <a:pt x="4798709" y="1594427"/>
+                  </a:lnTo>
+                  <a:lnTo>
+                    <a:pt x="4870331" y="1604784"/>
+                  </a:lnTo>
+                  <a:lnTo>
+                    <a:pt x="4941954" y="1614916"/>
+                  </a:lnTo>
+                  <a:lnTo>
+                    <a:pt x="5013576" y="1624830"/>
+                  </a:lnTo>
+                  <a:lnTo>
+                    <a:pt x="5085199" y="1634528"/>
+                  </a:lnTo>
+                  <a:lnTo>
+                    <a:pt x="5156821" y="1644017"/>
+                  </a:lnTo>
+                  <a:lnTo>
+                    <a:pt x="5228444" y="1653301"/>
+                  </a:lnTo>
+                  <a:lnTo>
+                    <a:pt x="5300066" y="1662383"/>
+                  </a:lnTo>
+                  <a:lnTo>
+                    <a:pt x="5371689" y="1671269"/>
+                  </a:lnTo>
+                  <a:lnTo>
+                    <a:pt x="5443311" y="1679963"/>
+                  </a:lnTo>
+                  <a:lnTo>
+                    <a:pt x="5514934" y="1688468"/>
+                  </a:lnTo>
+                  <a:lnTo>
+                    <a:pt x="5586557" y="1696789"/>
+                  </a:lnTo>
+                  <a:lnTo>
+                    <a:pt x="5658179" y="1704931"/>
+                  </a:lnTo>
+                  <a:lnTo>
+                    <a:pt x="5729802" y="1712896"/>
+                  </a:lnTo>
+                  <a:lnTo>
+                    <a:pt x="5801424" y="1720688"/>
+                  </a:lnTo>
+                  <a:lnTo>
+                    <a:pt x="5873047" y="1728312"/>
+                  </a:lnTo>
+                  <a:lnTo>
+                    <a:pt x="5944669" y="1735771"/>
+                  </a:lnTo>
+                  <a:lnTo>
+                    <a:pt x="6016292" y="1743069"/>
+                  </a:lnTo>
+                  <a:lnTo>
+                    <a:pt x="6087914" y="1750209"/>
+                  </a:lnTo>
+                  <a:lnTo>
+                    <a:pt x="6159537" y="1757194"/>
+                  </a:lnTo>
+                  <a:lnTo>
+                    <a:pt x="6231159" y="1764028"/>
+                  </a:lnTo>
+                  <a:lnTo>
+                    <a:pt x="6302782" y="1770714"/>
+                  </a:lnTo>
+                  <a:lnTo>
+                    <a:pt x="6374404" y="1777255"/>
+                  </a:lnTo>
+                  <a:lnTo>
+                    <a:pt x="6446027" y="1783654"/>
+                  </a:lnTo>
+                  <a:lnTo>
+                    <a:pt x="6517649" y="1789916"/>
+                  </a:lnTo>
+                  <a:lnTo>
+                    <a:pt x="6589272" y="1796041"/>
+                  </a:lnTo>
+                  <a:lnTo>
+                    <a:pt x="6660894" y="1802034"/>
+                  </a:lnTo>
+                  <a:lnTo>
+                    <a:pt x="6732517" y="1807898"/>
+                  </a:lnTo>
+                  <a:lnTo>
+                    <a:pt x="6804139" y="1813634"/>
+                  </a:lnTo>
+                  <a:lnTo>
+                    <a:pt x="6875762" y="1819247"/>
+                  </a:lnTo>
+                  <a:lnTo>
+                    <a:pt x="6947385" y="1824738"/>
+                  </a:lnTo>
+                  <a:lnTo>
+                    <a:pt x="7019007" y="1830110"/>
+                  </a:lnTo>
+                  <a:lnTo>
+                    <a:pt x="7090630" y="1835365"/>
                   </a:lnTo>
                 </a:path>
               </a:pathLst>
@@ -5023,7 +5023,7 @@
           </p:nvSpPr>
           <p:spPr>
             <a:xfrm>
-              <a:off x="4164901" y="2073503"/>
+              <a:off x="4170171" y="2073503"/>
               <a:ext cx="0" cy="3649639"/>
             </a:xfrm>
             <a:custGeom>
@@ -5296,7 +5296,7 @@
           </p:nvSpPr>
           <p:spPr>
             <a:xfrm>
-              <a:off x="1382692" y="5785772"/>
+              <a:off x="1383511" y="5785772"/>
               <a:ext cx="161574" cy="80101"/>
             </a:xfrm>
             <a:prstGeom prst="rect">
@@ -5342,7 +5342,7 @@
           </p:nvSpPr>
           <p:spPr>
             <a:xfrm>
-              <a:off x="2284877" y="5785772"/>
+              <a:off x="2285456" y="5785772"/>
               <a:ext cx="161574" cy="80101"/>
             </a:xfrm>
             <a:prstGeom prst="rect">
@@ -5388,7 +5388,7 @@
           </p:nvSpPr>
           <p:spPr>
             <a:xfrm>
-              <a:off x="3187061" y="5785772"/>
+              <a:off x="3187401" y="5785772"/>
               <a:ext cx="161574" cy="80101"/>
             </a:xfrm>
             <a:prstGeom prst="rect">
@@ -5434,7 +5434,7 @@
           </p:nvSpPr>
           <p:spPr>
             <a:xfrm>
-              <a:off x="4138944" y="5785772"/>
+              <a:off x="4139043" y="5785772"/>
               <a:ext cx="62179" cy="80101"/>
             </a:xfrm>
             <a:prstGeom prst="rect">
@@ -5480,7 +5480,7 @@
           </p:nvSpPr>
           <p:spPr>
             <a:xfrm>
-              <a:off x="5010039" y="5785772"/>
+              <a:off x="5009898" y="5785772"/>
               <a:ext cx="124358" cy="80101"/>
             </a:xfrm>
             <a:prstGeom prst="rect">
@@ -5526,7 +5526,7 @@
           </p:nvSpPr>
           <p:spPr>
             <a:xfrm>
-              <a:off x="5912223" y="5785772"/>
+              <a:off x="5911843" y="5785772"/>
               <a:ext cx="124358" cy="80101"/>
             </a:xfrm>
             <a:prstGeom prst="rect">
@@ -5572,7 +5572,7 @@
           </p:nvSpPr>
           <p:spPr>
             <a:xfrm>
-              <a:off x="6814408" y="5785772"/>
+              <a:off x="6813788" y="5785772"/>
               <a:ext cx="124358" cy="80101"/>
             </a:xfrm>
             <a:prstGeom prst="rect">
@@ -5618,7 +5618,7 @@
           </p:nvSpPr>
           <p:spPr>
             <a:xfrm>
-              <a:off x="7716592" y="5785772"/>
+              <a:off x="7715733" y="5785772"/>
               <a:ext cx="124358" cy="80101"/>
             </a:xfrm>
             <a:prstGeom prst="rect">
@@ -5789,7 +5789,7 @@
                   <a:latin typeface="Helvetica"/>
                   <a:cs typeface="Helvetica"/>
                 </a:rPr>
-                <a:t>subHR per 10 % decline: 1.32 (1.07-1.62), p_Bonf = 0.059 (n = 6)  |  per IQR decline (Δ = 27.4 %): 2.13 (1.20-3.77)  |  IQR: [-12.6, 14.8] %</a:t>
+                <a:t>subHR per 10 % decline: 1.32 (1.07-1.63), p_Bonf = 0.063 (n = 6)  |  per IQR decline (Δ = 27.2 %): 2.12 (1.19-3.76)  |  IQR: [-12.3, 14.9] %</a:t>
               </a:r>
             </a:p>
           </p:txBody>
